--- a/exports/pptx/lessons/middle-module-02-panchabhuta/day-07-group-discussion.pptx
+++ b/exports/pptx/lessons/middle-module-02-panchabhuta/day-07-group-discussion.pptx
@@ -18,9 +18,12 @@
     <p:sldId id="266" r:id="rId12"/>
     <p:sldId id="267" r:id="rId13"/>
     <p:sldId id="268" r:id="rId14"/>
+    <p:sldId id="269" r:id="rId15"/>
+    <p:sldId id="270" r:id="rId16"/>
+    <p:sldId id="271" r:id="rId17"/>
   </p:sldIdLst>
   <p:notesMasterIdLst>
-    <p:notesMasterId r:id="rId15"/>
+    <p:notesMasterId r:id="rId18"/>
   </p:notesMasterIdLst>
   <p:sldSz cx="9144000" cy="5143500"/>
   <p:notesSz cx="5143500" cy="9144000"/>
@@ -890,6 +893,270 @@
             <a:fld id="{F7021451-1387-4CA6-816F-3879F97B5CBC}" type="slidenum">
               <a:rPr lang="en-US"/>
               <a:t>13</a:t>
+            </a:fld>
+            <a:endParaRPr lang="en-US"/>
+          </a:p>
+        </p:txBody>
+      </p:sp>
+    </p:spTree>
+    <p:extLst>
+      <p:ext uri="{BB962C8B-B14F-4D97-AF65-F5344CB8AC3E}">
+        <p14:creationId xmlns:p14="http://schemas.microsoft.com/office/powerpoint/2010/main" val="1024086991"/>
+      </p:ext>
+    </p:extLst>
+  </p:cSld>
+  <p:clrMapOvr>
+    <a:masterClrMapping/>
+  </p:clrMapOvr>
+</p:notes>
+</file>
+
+<file path=ppt/notesSlides/notesSlide14.xml><?xml version="1.0" encoding="utf-8"?>
+<p:notes xmlns:a="http://schemas.openxmlformats.org/drawingml/2006/main" xmlns:r="http://schemas.openxmlformats.org/officeDocument/2006/relationships" xmlns:p="http://schemas.openxmlformats.org/presentationml/2006/main">
+  <p:cSld>
+    <p:spTree>
+      <p:nvGrpSpPr>
+        <p:cNvPr id="1" name=""/>
+        <p:cNvGrpSpPr/>
+        <p:nvPr/>
+      </p:nvGrpSpPr>
+      <p:grpSpPr>
+        <a:xfrm>
+          <a:off x="0" y="0"/>
+          <a:ext cx="0" cy="0"/>
+          <a:chOff x="0" y="0"/>
+          <a:chExt cx="0" cy="0"/>
+        </a:xfrm>
+      </p:grpSpPr>
+      <p:sp>
+        <p:nvSpPr>
+          <p:cNvPr id="2" name="Slide Image Placeholder 1"/>
+          <p:cNvSpPr>
+            <a:spLocks noGrp="1" noRot="1" noChangeAspect="1"/>
+          </p:cNvSpPr>
+          <p:nvPr>
+            <p:ph type="sldImg"/>
+          </p:nvPr>
+        </p:nvSpPr>
+        <p:spPr/>
+      </p:sp>
+      <p:sp>
+        <p:nvSpPr>
+          <p:cNvPr id="3" name="Notes Placeholder 2"/>
+          <p:cNvSpPr>
+            <a:spLocks noGrp="1"/>
+          </p:cNvSpPr>
+          <p:nvPr>
+            <p:ph type="body" idx="1"/>
+          </p:nvPr>
+        </p:nvSpPr>
+        <p:spPr/>
+        <p:txBody>
+          <a:bodyPr/>
+          <a:lstStyle/>
+          <a:p>
+            <a:r>
+              <a:rPr lang="en-US" dirty="0"/>
+              <a:t/>
+            </a:r>
+            <a:endParaRPr lang="en-US" dirty="0"/>
+          </a:p>
+        </p:txBody>
+      </p:sp>
+      <p:sp>
+        <p:nvSpPr>
+          <p:cNvPr id="4" name="Slide Number Placeholder 3"/>
+          <p:cNvSpPr>
+            <a:spLocks noGrp="1"/>
+          </p:cNvSpPr>
+          <p:nvPr>
+            <p:ph type="sldNum" sz="quarter" idx="10"/>
+          </p:nvPr>
+        </p:nvSpPr>
+        <p:spPr/>
+        <p:txBody>
+          <a:bodyPr/>
+          <a:lstStyle/>
+          <a:p>
+            <a:fld id="{F7021451-1387-4CA6-816F-3879F97B5CBC}" type="slidenum">
+              <a:rPr lang="en-US"/>
+              <a:t>14</a:t>
+            </a:fld>
+            <a:endParaRPr lang="en-US"/>
+          </a:p>
+        </p:txBody>
+      </p:sp>
+    </p:spTree>
+    <p:extLst>
+      <p:ext uri="{BB962C8B-B14F-4D97-AF65-F5344CB8AC3E}">
+        <p14:creationId xmlns:p14="http://schemas.microsoft.com/office/powerpoint/2010/main" val="1024086991"/>
+      </p:ext>
+    </p:extLst>
+  </p:cSld>
+  <p:clrMapOvr>
+    <a:masterClrMapping/>
+  </p:clrMapOvr>
+</p:notes>
+</file>
+
+<file path=ppt/notesSlides/notesSlide15.xml><?xml version="1.0" encoding="utf-8"?>
+<p:notes xmlns:a="http://schemas.openxmlformats.org/drawingml/2006/main" xmlns:r="http://schemas.openxmlformats.org/officeDocument/2006/relationships" xmlns:p="http://schemas.openxmlformats.org/presentationml/2006/main">
+  <p:cSld>
+    <p:spTree>
+      <p:nvGrpSpPr>
+        <p:cNvPr id="1" name=""/>
+        <p:cNvGrpSpPr/>
+        <p:nvPr/>
+      </p:nvGrpSpPr>
+      <p:grpSpPr>
+        <a:xfrm>
+          <a:off x="0" y="0"/>
+          <a:ext cx="0" cy="0"/>
+          <a:chOff x="0" y="0"/>
+          <a:chExt cx="0" cy="0"/>
+        </a:xfrm>
+      </p:grpSpPr>
+      <p:sp>
+        <p:nvSpPr>
+          <p:cNvPr id="2" name="Slide Image Placeholder 1"/>
+          <p:cNvSpPr>
+            <a:spLocks noGrp="1" noRot="1" noChangeAspect="1"/>
+          </p:cNvSpPr>
+          <p:nvPr>
+            <p:ph type="sldImg"/>
+          </p:nvPr>
+        </p:nvSpPr>
+        <p:spPr/>
+      </p:sp>
+      <p:sp>
+        <p:nvSpPr>
+          <p:cNvPr id="3" name="Notes Placeholder 2"/>
+          <p:cNvSpPr>
+            <a:spLocks noGrp="1"/>
+          </p:cNvSpPr>
+          <p:nvPr>
+            <p:ph type="body" idx="1"/>
+          </p:nvPr>
+        </p:nvSpPr>
+        <p:spPr/>
+        <p:txBody>
+          <a:bodyPr/>
+          <a:lstStyle/>
+          <a:p>
+            <a:r>
+              <a:rPr lang="en-US" dirty="0"/>
+              <a:t/>
+            </a:r>
+            <a:endParaRPr lang="en-US" dirty="0"/>
+          </a:p>
+        </p:txBody>
+      </p:sp>
+      <p:sp>
+        <p:nvSpPr>
+          <p:cNvPr id="4" name="Slide Number Placeholder 3"/>
+          <p:cNvSpPr>
+            <a:spLocks noGrp="1"/>
+          </p:cNvSpPr>
+          <p:nvPr>
+            <p:ph type="sldNum" sz="quarter" idx="10"/>
+          </p:nvPr>
+        </p:nvSpPr>
+        <p:spPr/>
+        <p:txBody>
+          <a:bodyPr/>
+          <a:lstStyle/>
+          <a:p>
+            <a:fld id="{F7021451-1387-4CA6-816F-3879F97B5CBC}" type="slidenum">
+              <a:rPr lang="en-US"/>
+              <a:t>15</a:t>
+            </a:fld>
+            <a:endParaRPr lang="en-US"/>
+          </a:p>
+        </p:txBody>
+      </p:sp>
+    </p:spTree>
+    <p:extLst>
+      <p:ext uri="{BB962C8B-B14F-4D97-AF65-F5344CB8AC3E}">
+        <p14:creationId xmlns:p14="http://schemas.microsoft.com/office/powerpoint/2010/main" val="1024086991"/>
+      </p:ext>
+    </p:extLst>
+  </p:cSld>
+  <p:clrMapOvr>
+    <a:masterClrMapping/>
+  </p:clrMapOvr>
+</p:notes>
+</file>
+
+<file path=ppt/notesSlides/notesSlide16.xml><?xml version="1.0" encoding="utf-8"?>
+<p:notes xmlns:a="http://schemas.openxmlformats.org/drawingml/2006/main" xmlns:r="http://schemas.openxmlformats.org/officeDocument/2006/relationships" xmlns:p="http://schemas.openxmlformats.org/presentationml/2006/main">
+  <p:cSld>
+    <p:spTree>
+      <p:nvGrpSpPr>
+        <p:cNvPr id="1" name=""/>
+        <p:cNvGrpSpPr/>
+        <p:nvPr/>
+      </p:nvGrpSpPr>
+      <p:grpSpPr>
+        <a:xfrm>
+          <a:off x="0" y="0"/>
+          <a:ext cx="0" cy="0"/>
+          <a:chOff x="0" y="0"/>
+          <a:chExt cx="0" cy="0"/>
+        </a:xfrm>
+      </p:grpSpPr>
+      <p:sp>
+        <p:nvSpPr>
+          <p:cNvPr id="2" name="Slide Image Placeholder 1"/>
+          <p:cNvSpPr>
+            <a:spLocks noGrp="1" noRot="1" noChangeAspect="1"/>
+          </p:cNvSpPr>
+          <p:nvPr>
+            <p:ph type="sldImg"/>
+          </p:nvPr>
+        </p:nvSpPr>
+        <p:spPr/>
+      </p:sp>
+      <p:sp>
+        <p:nvSpPr>
+          <p:cNvPr id="3" name="Notes Placeholder 2"/>
+          <p:cNvSpPr>
+            <a:spLocks noGrp="1"/>
+          </p:cNvSpPr>
+          <p:nvPr>
+            <p:ph type="body" idx="1"/>
+          </p:nvPr>
+        </p:nvSpPr>
+        <p:spPr/>
+        <p:txBody>
+          <a:bodyPr/>
+          <a:lstStyle/>
+          <a:p>
+            <a:r>
+              <a:rPr lang="en-US" dirty="0"/>
+              <a:t/>
+            </a:r>
+            <a:endParaRPr lang="en-US" dirty="0"/>
+          </a:p>
+        </p:txBody>
+      </p:sp>
+      <p:sp>
+        <p:nvSpPr>
+          <p:cNvPr id="4" name="Slide Number Placeholder 3"/>
+          <p:cNvSpPr>
+            <a:spLocks noGrp="1"/>
+          </p:cNvSpPr>
+          <p:nvPr>
+            <p:ph type="sldNum" sz="quarter" idx="10"/>
+          </p:nvPr>
+        </p:nvSpPr>
+        <p:spPr/>
+        <p:txBody>
+          <a:bodyPr/>
+          <a:lstStyle/>
+          <a:p>
+            <a:fld id="{F7021451-1387-4CA6-816F-3879F97B5CBC}" type="slidenum">
+              <a:rPr lang="en-US"/>
+              <a:t>16</a:t>
             </a:fld>
             <a:endParaRPr lang="en-US"/>
           </a:p>
@@ -2189,148 +2456,6 @@
         </p:nvSpPr>
         <p:spPr>
           <a:xfrm>
-            <a:off x="406301" y="1223963"/>
-            <a:ext cx="8498026" cy="274290"/>
-          </a:xfrm>
-          <a:prstGeom prst="rect">
-            <a:avLst/>
-          </a:prstGeom>
-          <a:noFill/>
-          <a:ln/>
-        </p:spPr>
-        <p:txBody>
-          <a:bodyPr wrap="square" lIns="0" tIns="0" rIns="0" bIns="0" rtlCol="0" anchor="t"/>
-          <a:lstStyle/>
-          <a:p>
-            <a:pPr algn="l" indent="0" marL="0">
-              <a:lnSpc>
-                <a:spcPts val="2160"/>
-              </a:lnSpc>
-              <a:spcBef>
-                <a:spcPts val="600"/>
-              </a:spcBef>
-              <a:spcAft>
-                <a:spcPts val="800"/>
-              </a:spcAft>
-              <a:buNone/>
-            </a:pPr>
-            <a:r>
-              <a:rPr lang="en-US" sz="1800" b="1" dirty="0">
-                <a:solidFill>
-                  <a:srgbClr val="FE4447"/>
-                </a:solidFill>
-                <a:latin typeface="Georgia" pitchFamily="34" charset="0"/>
-                <a:ea typeface="Georgia" pitchFamily="34" charset="-122"/>
-                <a:cs typeface="Georgia" pitchFamily="34" charset="-120"/>
-              </a:rPr>
-              <a:t>Learning objective</a:t>
-            </a:r>
-            <a:endParaRPr lang="en-US" sz="1800" dirty="0"/>
-          </a:p>
-        </p:txBody>
-      </p:sp>
-      <p:sp>
-        <p:nvSpPr>
-          <p:cNvPr id="6" name="Text 4"/>
-          <p:cNvSpPr/>
-          <p:nvPr/>
-        </p:nvSpPr>
-        <p:spPr>
-          <a:xfrm>
-            <a:off x="406301" y="1637854"/>
-            <a:ext cx="8498026" cy="426541"/>
-          </a:xfrm>
-          <a:prstGeom prst="rect">
-            <a:avLst/>
-          </a:prstGeom>
-          <a:noFill/>
-          <a:ln/>
-        </p:spPr>
-        <p:txBody>
-          <a:bodyPr wrap="square" lIns="0" tIns="0" rIns="0" bIns="0" rtlCol="0" anchor="t"/>
-          <a:lstStyle/>
-          <a:p>
-            <a:pPr algn="l" indent="0" marL="0">
-              <a:lnSpc>
-                <a:spcPts val="1680"/>
-              </a:lnSpc>
-              <a:spcBef>
-                <a:spcPts val="300"/>
-              </a:spcBef>
-              <a:spcAft>
-                <a:spcPts val="300"/>
-              </a:spcAft>
-              <a:buNone/>
-            </a:pPr>
-            <a:r>
-              <a:rPr lang="en-US" sz="1200" dirty="0">
-                <a:solidFill>
-                  <a:srgbClr val="1C2833"/>
-                </a:solidFill>
-                <a:latin typeface="Arial" pitchFamily="34" charset="0"/>
-                <a:ea typeface="Arial" pitchFamily="34" charset="-122"/>
-                <a:cs typeface="Arial" pitchFamily="34" charset="-120"/>
-              </a:rPr>
-              <a:t>By the end of this lesson, students will identify a real local example of one </a:t>
-            </a:r>
-            <a:pPr algn="l" indent="0" marL="0">
-              <a:lnSpc>
-                <a:spcPts val="1680"/>
-              </a:lnSpc>
-              <a:spcBef>
-                <a:spcPts val="300"/>
-              </a:spcBef>
-              <a:spcAft>
-                <a:spcPts val="300"/>
-              </a:spcAft>
-              <a:buNone/>
-            </a:pPr>
-            <a:r>
-              <a:rPr lang="en-US" sz="1200" i="1" dirty="0">
-                <a:solidFill>
-                  <a:srgbClr val="1C2833"/>
-                </a:solidFill>
-                <a:latin typeface="Arial" pitchFamily="34" charset="0"/>
-                <a:ea typeface="Arial" pitchFamily="34" charset="-122"/>
-                <a:cs typeface="Arial" pitchFamily="34" charset="-120"/>
-              </a:rPr>
-              <a:t>pañcabhūta</a:t>
-            </a:r>
-            <a:pPr algn="l" indent="0" marL="0">
-              <a:lnSpc>
-                <a:spcPts val="1680"/>
-              </a:lnSpc>
-              <a:spcBef>
-                <a:spcPts val="300"/>
-              </a:spcBef>
-              <a:spcAft>
-                <a:spcPts val="300"/>
-              </a:spcAft>
-              <a:buNone/>
-            </a:pPr>
-            <a:r>
-              <a:rPr lang="en-US" sz="1200" dirty="0">
-                <a:solidFill>
-                  <a:srgbClr val="1C2833"/>
-                </a:solidFill>
-                <a:latin typeface="Arial" pitchFamily="34" charset="0"/>
-                <a:ea typeface="Arial" pitchFamily="34" charset="-122"/>
-                <a:cs typeface="Arial" pitchFamily="34" charset="-120"/>
-              </a:rPr>
-              <a:t> being "out of balance" in their environment and propose one observable consequence and one mitigation action.</a:t>
-            </a:r>
-            <a:endParaRPr lang="en-US" sz="1200" dirty="0"/>
-          </a:p>
-        </p:txBody>
-      </p:sp>
-      <p:sp>
-        <p:nvSpPr>
-          <p:cNvPr id="7" name="Text 5"/>
-          <p:cNvSpPr/>
-          <p:nvPr/>
-        </p:nvSpPr>
-        <p:spPr>
-          <a:xfrm>
             <a:off x="406301" y="4434929"/>
             <a:ext cx="8498026" cy="213271"/>
           </a:xfrm>
@@ -2475,7 +2600,7 @@
                 <a:ea typeface="Georgia" pitchFamily="34" charset="-122"/>
                 <a:cs typeface="Georgia" pitchFamily="34" charset="-120"/>
               </a:rPr>
-              <a:t>Homework</a:t>
+              <a:t>Activity (20 min) — Five-Element Imbalance Map (cont.)</a:t>
             </a:r>
             <a:endParaRPr lang="en-US" sz="1800" dirty="0"/>
           </a:p>
@@ -2523,53 +2648,7 @@
                 <a:ea typeface="Arial" pitchFamily="34" charset="-122"/>
                 <a:cs typeface="Arial" pitchFamily="34" charset="-120"/>
               </a:rPr>
-              <a:t>– Bring </a:t>
-            </a:r>
-            <a:pPr algn="l" indent="0" marL="0">
-              <a:lnSpc>
-                <a:spcPts val="1680"/>
-              </a:lnSpc>
-              <a:spcBef>
-                <a:spcPts val="300"/>
-              </a:spcBef>
-              <a:spcAft>
-                <a:spcPts val="300"/>
-              </a:spcAft>
-              <a:buNone/>
-            </a:pPr>
-            <a:r>
-              <a:rPr lang="en-US" sz="1200" b="1" dirty="0">
-                <a:solidFill>
-                  <a:srgbClr val="1C2833"/>
-                </a:solidFill>
-                <a:latin typeface="Arial" pitchFamily="34" charset="0"/>
-                <a:ea typeface="Arial" pitchFamily="34" charset="-122"/>
-                <a:cs typeface="Arial" pitchFamily="34" charset="-120"/>
-              </a:rPr>
-              <a:t>all</a:t>
-            </a:r>
-            <a:pPr algn="l" indent="0" marL="0">
-              <a:lnSpc>
-                <a:spcPts val="1680"/>
-              </a:lnSpc>
-              <a:spcBef>
-                <a:spcPts val="300"/>
-              </a:spcBef>
-              <a:spcAft>
-                <a:spcPts val="300"/>
-              </a:spcAft>
-              <a:buNone/>
-            </a:pPr>
-            <a:r>
-              <a:rPr lang="en-US" sz="1200" dirty="0">
-                <a:solidFill>
-                  <a:srgbClr val="1C2833"/>
-                </a:solidFill>
-                <a:latin typeface="Arial" pitchFamily="34" charset="0"/>
-                <a:ea typeface="Arial" pitchFamily="34" charset="-122"/>
-                <a:cs typeface="Arial" pitchFamily="34" charset="-120"/>
-              </a:rPr>
-              <a:t> project materials to tomorrow's session. The work begins in earnest. – For your project, consider: is there a small element of "imbalance" worth showing alongside the element's main story?</a:t>
+              <a:t>Each group sticks their chart on the wall. Gallery walk: students rotate, read all five charts, and place a sticky note on the action they'd most commit to.</a:t>
             </a:r>
             <a:endParaRPr lang="en-US" sz="1200" dirty="0"/>
           </a:p>
@@ -2727,7 +2806,7 @@
                 <a:ea typeface="Georgia" pitchFamily="34" charset="-122"/>
                 <a:cs typeface="Georgia" pitchFamily="34" charset="-120"/>
               </a:rPr>
-              <a:t>Differentiation</a:t>
+              <a:t>Wrap-up (5 min)</a:t>
             </a:r>
             <a:endParaRPr lang="en-US" sz="1800" dirty="0"/>
           </a:p>
@@ -2742,7 +2821,7 @@
         <p:spPr>
           <a:xfrm>
             <a:off x="634901" y="883593"/>
-            <a:ext cx="8102798" cy="731341"/>
+            <a:ext cx="8102798" cy="769441"/>
           </a:xfrm>
           <a:prstGeom prst="rect">
             <a:avLst/>
@@ -2765,26 +2844,6 @@
               <a:buChar char="•"/>
             </a:pPr>
             <a:r>
-              <a:rPr lang="en-US" sz="1200" b="1" dirty="0">
-                <a:solidFill>
-                  <a:srgbClr val="1C2833"/>
-                </a:solidFill>
-                <a:latin typeface="Arial" pitchFamily="34" charset="0"/>
-                <a:ea typeface="Arial" pitchFamily="34" charset="-122"/>
-                <a:cs typeface="Arial" pitchFamily="34" charset="-120"/>
-              </a:rPr>
-              <a:t>One tier up:</a:t>
-            </a:r>
-            <a:pPr algn="l" indent="0" marL="0">
-              <a:lnSpc>
-                <a:spcPts val="1620"/>
-              </a:lnSpc>
-              <a:spcAft>
-                <a:spcPts val="300"/>
-              </a:spcAft>
-              <a:buNone/>
-            </a:pPr>
-            <a:r>
               <a:rPr lang="en-US" sz="1200" dirty="0">
                 <a:solidFill>
                   <a:srgbClr val="1C2833"/>
@@ -2793,7 +2852,7 @@
                 <a:ea typeface="Arial" pitchFamily="34" charset="-122"/>
                 <a:cs typeface="Arial" pitchFamily="34" charset="-120"/>
               </a:rPr>
-              <a:t> Pick TWO elements and explain how an imbalance in one causes an imbalance in the other. Be specific.</a:t>
+              <a:t>Each group reads aloud their chosen action (just the one line).</a:t>
             </a:r>
             <a:endParaRPr lang="en-US" sz="1200" dirty="0"/>
           </a:p>
@@ -2809,15 +2868,15 @@
               <a:buChar char="•"/>
             </a:pPr>
             <a:r>
-              <a:rPr lang="en-US" sz="1200" b="1" dirty="0">
-                <a:solidFill>
-                  <a:srgbClr val="1C2833"/>
-                </a:solidFill>
-                <a:latin typeface="Arial" pitchFamily="34" charset="0"/>
-                <a:ea typeface="Arial" pitchFamily="34" charset="-122"/>
-                <a:cs typeface="Arial" pitchFamily="34" charset="-120"/>
-              </a:rPr>
-              <a:t>One tier down:</a:t>
+              <a:rPr lang="en-US" sz="1200" dirty="0">
+                <a:solidFill>
+                  <a:srgbClr val="1C2833"/>
+                </a:solidFill>
+                <a:latin typeface="Arial" pitchFamily="34" charset="0"/>
+                <a:ea typeface="Arial" pitchFamily="34" charset="-122"/>
+                <a:cs typeface="Arial" pitchFamily="34" charset="-120"/>
+              </a:rPr>
+              <a:t>Note: </a:t>
             </a:r>
             <a:pPr algn="l" indent="0" marL="0">
               <a:lnSpc>
@@ -2829,6 +2888,30 @@
               <a:buNone/>
             </a:pPr>
             <a:r>
+              <a:rPr lang="en-US" sz="1200" i="1" dirty="0">
+                <a:solidFill>
+                  <a:srgbClr val="1C2833"/>
+                </a:solidFill>
+                <a:latin typeface="Arial" pitchFamily="34" charset="0"/>
+                <a:ea typeface="Arial" pitchFamily="34" charset="-122"/>
+                <a:cs typeface="Arial" pitchFamily="34" charset="-120"/>
+              </a:rPr>
+              <a:t>"Notice how no single action solves everything — but every chart has at least one thing that's doable."</a:t>
+            </a:r>
+            <a:endParaRPr lang="en-US" sz="1200" dirty="0"/>
+          </a:p>
+          <a:p>
+            <a:pPr algn="l" marL="342900" indent="-342900">
+              <a:lnSpc>
+                <a:spcPts val="1620"/>
+              </a:lnSpc>
+              <a:spcAft>
+                <a:spcPts val="300"/>
+              </a:spcAft>
+              <a:buSzPct val="100000"/>
+              <a:buChar char="•"/>
+            </a:pPr>
+            <a:r>
               <a:rPr lang="en-US" sz="1200" dirty="0">
                 <a:solidFill>
                   <a:srgbClr val="1C2833"/>
@@ -2837,7 +2920,7 @@
                 <a:ea typeface="Arial" pitchFamily="34" charset="-122"/>
                 <a:cs typeface="Arial" pitchFamily="34" charset="-120"/>
               </a:rPr>
-              <a:t> Focus on choosing ONE concrete action you can commit to this week (carry a water bottle to reduce plastic, switch off lights when leaving a room, etc.). The systems-thinking can come later.</a:t>
+              <a:t>Preview Day 8: project work begins. Bring all your materials tomorrow.</a:t>
             </a:r>
             <a:endParaRPr lang="en-US" sz="1200" dirty="0"/>
           </a:p>
@@ -2995,7 +3078,7 @@
                 <a:ea typeface="Georgia" pitchFamily="34" charset="-122"/>
                 <a:cs typeface="Georgia" pitchFamily="34" charset="-120"/>
               </a:rPr>
-              <a:t>Teacher notes</a:t>
+              <a:t>Student-facing content</a:t>
             </a:r>
             <a:endParaRPr lang="en-US" sz="1800" dirty="0"/>
           </a:p>
@@ -3009,8 +3092,61 @@
         </p:nvSpPr>
         <p:spPr>
           <a:xfrm>
-            <a:off x="406301" y="870942"/>
-            <a:ext cx="8498026" cy="1066354"/>
+            <a:off x="406301" y="883593"/>
+            <a:ext cx="8331398" cy="3074194"/>
+          </a:xfrm>
+          <a:prstGeom prst="rect">
+            <a:avLst/>
+          </a:prstGeom>
+          <a:solidFill>
+            <a:srgbClr val="F4F8F9"/>
+          </a:solidFill>
+          <a:ln/>
+        </p:spPr>
+        <p:txBody>
+          <a:bodyPr wrap="square" rtlCol="0" anchor="ctr"/>
+          <a:lstStyle/>
+          <a:p>
+            <a:pPr indent="0" marL="0">
+              <a:buNone/>
+            </a:pPr>
+            <a:endParaRPr lang="en-US" dirty="0"/>
+          </a:p>
+        </p:txBody>
+      </p:sp>
+      <p:sp>
+        <p:nvSpPr>
+          <p:cNvPr id="5" name="Shape 3"/>
+          <p:cNvSpPr/>
+          <p:nvPr/>
+        </p:nvSpPr>
+        <p:spPr>
+          <a:xfrm>
+            <a:off x="434876" y="883593"/>
+            <a:ext cx="0" cy="3074194"/>
+          </a:xfrm>
+          <a:prstGeom prst="line">
+            <a:avLst/>
+          </a:prstGeom>
+          <a:noFill/>
+          <a:ln w="57150">
+            <a:solidFill>
+              <a:srgbClr val="FE4447"/>
+            </a:solidFill>
+            <a:prstDash val="solid"/>
+          </a:ln>
+        </p:spPr>
+      </p:sp>
+      <p:sp>
+        <p:nvSpPr>
+          <p:cNvPr id="6" name="Text 4"/>
+          <p:cNvSpPr/>
+          <p:nvPr/>
+        </p:nvSpPr>
+        <p:spPr>
+          <a:xfrm>
+            <a:off x="692051" y="1074093"/>
+            <a:ext cx="7973389" cy="230981"/>
           </a:xfrm>
           <a:prstGeom prst="rect">
             <a:avLst/>
@@ -3024,7 +3160,7 @@
           <a:p>
             <a:pPr algn="l" indent="0" marL="0">
               <a:lnSpc>
-                <a:spcPts val="1680"/>
+                <a:spcPts val="1820"/>
               </a:lnSpc>
               <a:spcBef>
                 <a:spcPts val="300"/>
@@ -3035,19 +3171,44 @@
               <a:buNone/>
             </a:pPr>
             <a:r>
-              <a:rPr lang="en-US" sz="1200" dirty="0">
-                <a:solidFill>
-                  <a:srgbClr val="1C2833"/>
-                </a:solidFill>
-                <a:latin typeface="Arial" pitchFamily="34" charset="0"/>
-                <a:ea typeface="Arial" pitchFamily="34" charset="-122"/>
-                <a:cs typeface="Arial" pitchFamily="34" charset="-120"/>
-              </a:rPr>
-              <a:t>– This lesson connects to NEP §11.8 (multidisciplinary linkage) and is a natural lead-in to Module 13 (Indic Ecology) when the time comes. – Some students may feel discouraged by the scale of the problems. Don't soften the reality, but anchor every imbalance to a doable response. The point is agency, not despair. – If your school is in a location with a </a:t>
-            </a:r>
-            <a:pPr algn="l" indent="0" marL="0">
-              <a:lnSpc>
-                <a:spcPts val="1680"/>
+              <a:rPr lang="en-US" sz="1300" b="1" i="1" dirty="0">
+                <a:solidFill>
+                  <a:srgbClr val="1C2833"/>
+                </a:solidFill>
+                <a:latin typeface="Georgia" pitchFamily="34" charset="0"/>
+                <a:ea typeface="Georgia" pitchFamily="34" charset="-122"/>
+                <a:cs typeface="Georgia" pitchFamily="34" charset="-120"/>
+              </a:rPr>
+              <a:t>Balance and imbalance</a:t>
+            </a:r>
+            <a:endParaRPr lang="en-US" sz="1300" dirty="0"/>
+          </a:p>
+        </p:txBody>
+      </p:sp>
+      <p:sp>
+        <p:nvSpPr>
+          <p:cNvPr id="7" name="Text 5"/>
+          <p:cNvSpPr/>
+          <p:nvPr/>
+        </p:nvSpPr>
+        <p:spPr>
+          <a:xfrm>
+            <a:off x="692051" y="1343174"/>
+            <a:ext cx="7973389" cy="461963"/>
+          </a:xfrm>
+          <a:prstGeom prst="rect">
+            <a:avLst/>
+          </a:prstGeom>
+          <a:noFill/>
+          <a:ln/>
+        </p:spPr>
+        <p:txBody>
+          <a:bodyPr wrap="square" lIns="0" tIns="0" rIns="0" bIns="0" rtlCol="0" anchor="t"/>
+          <a:lstStyle/>
+          <a:p>
+            <a:pPr algn="l" indent="0" marL="0">
+              <a:lnSpc>
+                <a:spcPts val="1820"/>
               </a:lnSpc>
               <a:spcBef>
                 <a:spcPts val="300"/>
@@ -3058,19 +3219,44 @@
               <a:buNone/>
             </a:pPr>
             <a:r>
-              <a:rPr lang="en-US" sz="1200" i="1" dirty="0">
-                <a:solidFill>
-                  <a:srgbClr val="1C2833"/>
-                </a:solidFill>
-                <a:latin typeface="Arial" pitchFamily="34" charset="0"/>
-                <a:ea typeface="Arial" pitchFamily="34" charset="-122"/>
-                <a:cs typeface="Arial" pitchFamily="34" charset="-120"/>
-              </a:rPr>
-              <a:t>specific</a:t>
-            </a:r>
-            <a:pPr algn="l" indent="0" marL="0">
-              <a:lnSpc>
-                <a:spcPts val="1680"/>
+              <a:rPr lang="en-US" sz="1300" i="1" dirty="0">
+                <a:solidFill>
+                  <a:srgbClr val="1C2833"/>
+                </a:solidFill>
+                <a:latin typeface="Georgia" pitchFamily="34" charset="0"/>
+                <a:ea typeface="Georgia" pitchFamily="34" charset="-122"/>
+                <a:cs typeface="Georgia" pitchFamily="34" charset="-120"/>
+              </a:rPr>
+              <a:t>A healthy environment has all five elements in balance. When one takes over or disappears, the others suffer.</a:t>
+            </a:r>
+            <a:endParaRPr lang="en-US" sz="1300" dirty="0"/>
+          </a:p>
+        </p:txBody>
+      </p:sp>
+      <p:sp>
+        <p:nvSpPr>
+          <p:cNvPr id="8" name="Text 6"/>
+          <p:cNvSpPr/>
+          <p:nvPr/>
+        </p:nvSpPr>
+        <p:spPr>
+          <a:xfrm>
+            <a:off x="692051" y="1843236"/>
+            <a:ext cx="7973389" cy="230981"/>
+          </a:xfrm>
+          <a:prstGeom prst="rect">
+            <a:avLst/>
+          </a:prstGeom>
+          <a:noFill/>
+          <a:ln/>
+        </p:spPr>
+        <p:txBody>
+          <a:bodyPr wrap="square" lIns="0" tIns="0" rIns="0" bIns="0" rtlCol="0" anchor="t"/>
+          <a:lstStyle/>
+          <a:p>
+            <a:pPr algn="l" indent="0" marL="0">
+              <a:lnSpc>
+                <a:spcPts val="1820"/>
               </a:lnSpc>
               <a:spcBef>
                 <a:spcPts val="300"/>
@@ -3081,23 +3267,395 @@
               <a:buNone/>
             </a:pPr>
             <a:r>
-              <a:rPr lang="en-US" sz="1200" dirty="0">
-                <a:solidFill>
-                  <a:srgbClr val="1C2833"/>
-                </a:solidFill>
-                <a:latin typeface="Arial" pitchFamily="34" charset="0"/>
-                <a:ea typeface="Arial" pitchFamily="34" charset="-122"/>
-                <a:cs typeface="Arial" pitchFamily="34" charset="-120"/>
-              </a:rPr>
-              <a:t> well-known environmental issue (e.g. a polluted river, a heavily quarried hillside), centre that as the case study and skip the air-pollution example.</a:t>
-            </a:r>
-            <a:endParaRPr lang="en-US" sz="1200" dirty="0"/>
-          </a:p>
-        </p:txBody>
-      </p:sp>
-      <p:sp>
-        <p:nvSpPr>
-          <p:cNvPr id="5" name="Text 3"/>
+              <a:rPr lang="en-US" sz="1300" i="1" dirty="0">
+                <a:solidFill>
+                  <a:srgbClr val="1C2833"/>
+                </a:solidFill>
+                <a:latin typeface="Georgia" pitchFamily="34" charset="0"/>
+                <a:ea typeface="Georgia" pitchFamily="34" charset="-122"/>
+                <a:cs typeface="Georgia" pitchFamily="34" charset="-120"/>
+              </a:rPr>
+              <a:t>Examples of imbalance you might recognise:</a:t>
+            </a:r>
+            <a:endParaRPr lang="en-US" sz="1300" dirty="0"/>
+          </a:p>
+        </p:txBody>
+      </p:sp>
+      <p:sp>
+        <p:nvSpPr>
+          <p:cNvPr id="9" name="Text 7"/>
+          <p:cNvSpPr/>
+          <p:nvPr/>
+        </p:nvSpPr>
+        <p:spPr>
+          <a:xfrm>
+            <a:off x="692051" y="2112318"/>
+            <a:ext cx="7973389" cy="1154906"/>
+          </a:xfrm>
+          <a:prstGeom prst="rect">
+            <a:avLst/>
+          </a:prstGeom>
+          <a:noFill/>
+          <a:ln/>
+        </p:spPr>
+        <p:txBody>
+          <a:bodyPr wrap="square" lIns="0" tIns="0" rIns="0" bIns="0" rtlCol="0" anchor="t"/>
+          <a:lstStyle/>
+          <a:p>
+            <a:pPr algn="l" indent="0" marL="0">
+              <a:lnSpc>
+                <a:spcPts val="1820"/>
+              </a:lnSpc>
+              <a:spcBef>
+                <a:spcPts val="300"/>
+              </a:spcBef>
+              <a:spcAft>
+                <a:spcPts val="300"/>
+              </a:spcAft>
+              <a:buNone/>
+            </a:pPr>
+            <a:r>
+              <a:rPr lang="en-US" sz="1300" dirty="0">
+                <a:solidFill>
+                  <a:srgbClr val="1C2833"/>
+                </a:solidFill>
+                <a:latin typeface="Georgia" pitchFamily="34" charset="0"/>
+                <a:ea typeface="Georgia" pitchFamily="34" charset="-122"/>
+                <a:cs typeface="Georgia" pitchFamily="34" charset="-120"/>
+              </a:rPr>
+              <a:t>| Imbalance | What you observe | |-----------|------------------| | Too much </a:t>
+            </a:r>
+            <a:pPr algn="l" indent="0" marL="0">
+              <a:lnSpc>
+                <a:spcPts val="1820"/>
+              </a:lnSpc>
+              <a:spcBef>
+                <a:spcPts val="300"/>
+              </a:spcBef>
+              <a:spcAft>
+                <a:spcPts val="300"/>
+              </a:spcAft>
+              <a:buNone/>
+            </a:pPr>
+            <a:r>
+              <a:rPr lang="en-US" sz="1300" i="1" dirty="0">
+                <a:solidFill>
+                  <a:srgbClr val="1C2833"/>
+                </a:solidFill>
+                <a:latin typeface="Georgia" pitchFamily="34" charset="0"/>
+                <a:ea typeface="Georgia" pitchFamily="34" charset="-122"/>
+                <a:cs typeface="Georgia" pitchFamily="34" charset="-120"/>
+              </a:rPr>
+              <a:t>tejas</a:t>
+            </a:r>
+            <a:pPr algn="l" indent="0" marL="0">
+              <a:lnSpc>
+                <a:spcPts val="1820"/>
+              </a:lnSpc>
+              <a:spcBef>
+                <a:spcPts val="300"/>
+              </a:spcBef>
+              <a:spcAft>
+                <a:spcPts val="300"/>
+              </a:spcAft>
+              <a:buNone/>
+            </a:pPr>
+            <a:r>
+              <a:rPr lang="en-US" sz="1300" dirty="0">
+                <a:solidFill>
+                  <a:srgbClr val="1C2833"/>
+                </a:solidFill>
+                <a:latin typeface="Georgia" pitchFamily="34" charset="0"/>
+                <a:ea typeface="Georgia" pitchFamily="34" charset="-122"/>
+                <a:cs typeface="Georgia" pitchFamily="34" charset="-120"/>
+              </a:rPr>
+              <a:t> (heat) | Urban heat-island; summer power cuts | | Too little </a:t>
+            </a:r>
+            <a:pPr algn="l" indent="0" marL="0">
+              <a:lnSpc>
+                <a:spcPts val="1820"/>
+              </a:lnSpc>
+              <a:spcBef>
+                <a:spcPts val="300"/>
+              </a:spcBef>
+              <a:spcAft>
+                <a:spcPts val="300"/>
+              </a:spcAft>
+              <a:buNone/>
+            </a:pPr>
+            <a:r>
+              <a:rPr lang="en-US" sz="1300" i="1" dirty="0">
+                <a:solidFill>
+                  <a:srgbClr val="1C2833"/>
+                </a:solidFill>
+                <a:latin typeface="Georgia" pitchFamily="34" charset="0"/>
+                <a:ea typeface="Georgia" pitchFamily="34" charset="-122"/>
+                <a:cs typeface="Georgia" pitchFamily="34" charset="-120"/>
+              </a:rPr>
+              <a:t>ap</a:t>
+            </a:r>
+            <a:pPr algn="l" indent="0" marL="0">
+              <a:lnSpc>
+                <a:spcPts val="1820"/>
+              </a:lnSpc>
+              <a:spcBef>
+                <a:spcPts val="300"/>
+              </a:spcBef>
+              <a:spcAft>
+                <a:spcPts val="300"/>
+              </a:spcAft>
+              <a:buNone/>
+            </a:pPr>
+            <a:r>
+              <a:rPr lang="en-US" sz="1300" dirty="0">
+                <a:solidFill>
+                  <a:srgbClr val="1C2833"/>
+                </a:solidFill>
+                <a:latin typeface="Georgia" pitchFamily="34" charset="0"/>
+                <a:ea typeface="Georgia" pitchFamily="34" charset="-122"/>
+                <a:cs typeface="Georgia" pitchFamily="34" charset="-120"/>
+              </a:rPr>
+              <a:t> (water) | Drought; failed crops; long water-queue at the tap | | Polluted </a:t>
+            </a:r>
+            <a:pPr algn="l" indent="0" marL="0">
+              <a:lnSpc>
+                <a:spcPts val="1820"/>
+              </a:lnSpc>
+              <a:spcBef>
+                <a:spcPts val="300"/>
+              </a:spcBef>
+              <a:spcAft>
+                <a:spcPts val="300"/>
+              </a:spcAft>
+              <a:buNone/>
+            </a:pPr>
+            <a:r>
+              <a:rPr lang="en-US" sz="1300" i="1" dirty="0">
+                <a:solidFill>
+                  <a:srgbClr val="1C2833"/>
+                </a:solidFill>
+                <a:latin typeface="Georgia" pitchFamily="34" charset="0"/>
+                <a:ea typeface="Georgia" pitchFamily="34" charset="-122"/>
+                <a:cs typeface="Georgia" pitchFamily="34" charset="-120"/>
+              </a:rPr>
+              <a:t>vāyu</a:t>
+            </a:r>
+            <a:pPr algn="l" indent="0" marL="0">
+              <a:lnSpc>
+                <a:spcPts val="1820"/>
+              </a:lnSpc>
+              <a:spcBef>
+                <a:spcPts val="300"/>
+              </a:spcBef>
+              <a:spcAft>
+                <a:spcPts val="300"/>
+              </a:spcAft>
+              <a:buNone/>
+            </a:pPr>
+            <a:r>
+              <a:rPr lang="en-US" sz="1300" dirty="0">
+                <a:solidFill>
+                  <a:srgbClr val="1C2833"/>
+                </a:solidFill>
+                <a:latin typeface="Georgia" pitchFamily="34" charset="0"/>
+                <a:ea typeface="Georgia" pitchFamily="34" charset="-122"/>
+                <a:cs typeface="Georgia" pitchFamily="34" charset="-120"/>
+              </a:rPr>
+              <a:t> (air) | Smog; difficulty breathing on bad-air days | | Polluted </a:t>
+            </a:r>
+            <a:pPr algn="l" indent="0" marL="0">
+              <a:lnSpc>
+                <a:spcPts val="1820"/>
+              </a:lnSpc>
+              <a:spcBef>
+                <a:spcPts val="300"/>
+              </a:spcBef>
+              <a:spcAft>
+                <a:spcPts val="300"/>
+              </a:spcAft>
+              <a:buNone/>
+            </a:pPr>
+            <a:r>
+              <a:rPr lang="en-US" sz="1300" i="1" dirty="0">
+                <a:solidFill>
+                  <a:srgbClr val="1C2833"/>
+                </a:solidFill>
+                <a:latin typeface="Georgia" pitchFamily="34" charset="0"/>
+                <a:ea typeface="Georgia" pitchFamily="34" charset="-122"/>
+                <a:cs typeface="Georgia" pitchFamily="34" charset="-120"/>
+              </a:rPr>
+              <a:t>pṛthvī</a:t>
+            </a:r>
+            <a:pPr algn="l" indent="0" marL="0">
+              <a:lnSpc>
+                <a:spcPts val="1820"/>
+              </a:lnSpc>
+              <a:spcBef>
+                <a:spcPts val="300"/>
+              </a:spcBef>
+              <a:spcAft>
+                <a:spcPts val="300"/>
+              </a:spcAft>
+              <a:buNone/>
+            </a:pPr>
+            <a:r>
+              <a:rPr lang="en-US" sz="1300" dirty="0">
+                <a:solidFill>
+                  <a:srgbClr val="1C2833"/>
+                </a:solidFill>
+                <a:latin typeface="Georgia" pitchFamily="34" charset="0"/>
+                <a:ea typeface="Georgia" pitchFamily="34" charset="-122"/>
+                <a:cs typeface="Georgia" pitchFamily="34" charset="-120"/>
+              </a:rPr>
+              <a:t> (earth) | Plastic waste; barren soil; landfill near homes | | Noisy </a:t>
+            </a:r>
+            <a:pPr algn="l" indent="0" marL="0">
+              <a:lnSpc>
+                <a:spcPts val="1820"/>
+              </a:lnSpc>
+              <a:spcBef>
+                <a:spcPts val="300"/>
+              </a:spcBef>
+              <a:spcAft>
+                <a:spcPts val="300"/>
+              </a:spcAft>
+              <a:buNone/>
+            </a:pPr>
+            <a:r>
+              <a:rPr lang="en-US" sz="1300" i="1" dirty="0">
+                <a:solidFill>
+                  <a:srgbClr val="1C2833"/>
+                </a:solidFill>
+                <a:latin typeface="Georgia" pitchFamily="34" charset="0"/>
+                <a:ea typeface="Georgia" pitchFamily="34" charset="-122"/>
+                <a:cs typeface="Georgia" pitchFamily="34" charset="-120"/>
+              </a:rPr>
+              <a:t>ākāśa</a:t>
+            </a:r>
+            <a:pPr algn="l" indent="0" marL="0">
+              <a:lnSpc>
+                <a:spcPts val="1820"/>
+              </a:lnSpc>
+              <a:spcBef>
+                <a:spcPts val="300"/>
+              </a:spcBef>
+              <a:spcAft>
+                <a:spcPts val="300"/>
+              </a:spcAft>
+              <a:buNone/>
+            </a:pPr>
+            <a:r>
+              <a:rPr lang="en-US" sz="1300" dirty="0">
+                <a:solidFill>
+                  <a:srgbClr val="1C2833"/>
+                </a:solidFill>
+                <a:latin typeface="Georgia" pitchFamily="34" charset="0"/>
+                <a:ea typeface="Georgia" pitchFamily="34" charset="-122"/>
+                <a:cs typeface="Georgia" pitchFamily="34" charset="-120"/>
+              </a:rPr>
+              <a:t> | Sound pollution; sleep disturbance; bad concentration |</a:t>
+            </a:r>
+            <a:endParaRPr lang="en-US" sz="1300" dirty="0"/>
+          </a:p>
+        </p:txBody>
+      </p:sp>
+      <p:sp>
+        <p:nvSpPr>
+          <p:cNvPr id="10" name="Text 8"/>
+          <p:cNvSpPr/>
+          <p:nvPr/>
+        </p:nvSpPr>
+        <p:spPr>
+          <a:xfrm>
+            <a:off x="692051" y="3305324"/>
+            <a:ext cx="7973389" cy="461963"/>
+          </a:xfrm>
+          <a:prstGeom prst="rect">
+            <a:avLst/>
+          </a:prstGeom>
+          <a:noFill/>
+          <a:ln/>
+        </p:spPr>
+        <p:txBody>
+          <a:bodyPr wrap="square" lIns="0" tIns="0" rIns="0" bIns="0" rtlCol="0" anchor="t"/>
+          <a:lstStyle/>
+          <a:p>
+            <a:pPr algn="l" indent="0" marL="0">
+              <a:lnSpc>
+                <a:spcPts val="1820"/>
+              </a:lnSpc>
+              <a:spcBef>
+                <a:spcPts val="300"/>
+              </a:spcBef>
+              <a:spcAft>
+                <a:spcPts val="300"/>
+              </a:spcAft>
+              <a:buNone/>
+            </a:pPr>
+            <a:r>
+              <a:rPr lang="en-US" sz="1300" dirty="0">
+                <a:solidFill>
+                  <a:srgbClr val="1C2833"/>
+                </a:solidFill>
+                <a:latin typeface="Georgia" pitchFamily="34" charset="0"/>
+                <a:ea typeface="Georgia" pitchFamily="34" charset="-122"/>
+                <a:cs typeface="Georgia" pitchFamily="34" charset="-120"/>
+              </a:rPr>
+              <a:t>The Sanskrit concept </a:t>
+            </a:r>
+            <a:pPr algn="l" indent="0" marL="0">
+              <a:lnSpc>
+                <a:spcPts val="1820"/>
+              </a:lnSpc>
+              <a:spcBef>
+                <a:spcPts val="300"/>
+              </a:spcBef>
+              <a:spcAft>
+                <a:spcPts val="300"/>
+              </a:spcAft>
+              <a:buNone/>
+            </a:pPr>
+            <a:r>
+              <a:rPr lang="en-US" sz="1300" i="1" dirty="0">
+                <a:solidFill>
+                  <a:srgbClr val="1C2833"/>
+                </a:solidFill>
+                <a:latin typeface="Georgia" pitchFamily="34" charset="0"/>
+                <a:ea typeface="Georgia" pitchFamily="34" charset="-122"/>
+                <a:cs typeface="Georgia" pitchFamily="34" charset="-120"/>
+              </a:rPr>
+              <a:t>Vasudhaiva Kuṭumbakam</a:t>
+            </a:r>
+            <a:pPr algn="l" indent="0" marL="0">
+              <a:lnSpc>
+                <a:spcPts val="1820"/>
+              </a:lnSpc>
+              <a:spcBef>
+                <a:spcPts val="300"/>
+              </a:spcBef>
+              <a:spcAft>
+                <a:spcPts val="300"/>
+              </a:spcAft>
+              <a:buNone/>
+            </a:pPr>
+            <a:r>
+              <a:rPr lang="en-US" sz="1300" dirty="0">
+                <a:solidFill>
+                  <a:srgbClr val="1C2833"/>
+                </a:solidFill>
+                <a:latin typeface="Georgia" pitchFamily="34" charset="0"/>
+                <a:ea typeface="Georgia" pitchFamily="34" charset="-122"/>
+                <a:cs typeface="Georgia" pitchFamily="34" charset="-120"/>
+              </a:rPr>
+              <a:t> — "the earth is one family" — is the ecological framing for this. We'll meet it again in Module 13.</a:t>
+            </a:r>
+            <a:endParaRPr lang="en-US" sz="1300" dirty="0"/>
+          </a:p>
+        </p:txBody>
+      </p:sp>
+      <p:sp>
+        <p:nvSpPr>
+          <p:cNvPr id="11" name="Text 9"/>
           <p:cNvSpPr/>
           <p:nvPr/>
         </p:nvSpPr>
@@ -3247,7 +3805,7 @@
                 <a:ea typeface="Georgia" pitchFamily="34" charset="-122"/>
                 <a:cs typeface="Georgia" pitchFamily="34" charset="-120"/>
               </a:rPr>
-              <a:t>Citation(s) used in this lesson</a:t>
+              <a:t>Homework</a:t>
             </a:r>
             <a:endParaRPr lang="en-US" sz="1800" dirty="0"/>
           </a:p>
@@ -3262,7 +3820,7 @@
         <p:spPr>
           <a:xfrm>
             <a:off x="634901" y="883593"/>
-            <a:ext cx="8102798" cy="281880"/>
+            <a:ext cx="8102798" cy="525661"/>
           </a:xfrm>
           <a:prstGeom prst="rect">
             <a:avLst/>
@@ -3285,15 +3843,15 @@
               <a:buChar char="•"/>
             </a:pPr>
             <a:r>
-              <a:rPr lang="en-US" sz="1200" i="1" dirty="0">
-                <a:solidFill>
-                  <a:srgbClr val="1C2833"/>
-                </a:solidFill>
-                <a:latin typeface="Arial" pitchFamily="34" charset="0"/>
-                <a:ea typeface="Arial" pitchFamily="34" charset="-122"/>
-                <a:cs typeface="Arial" pitchFamily="34" charset="-120"/>
-              </a:rPr>
-              <a:t>Vasudhaiva Kuṭumbakam</a:t>
+              <a:rPr lang="en-US" sz="1200" dirty="0">
+                <a:solidFill>
+                  <a:srgbClr val="1C2833"/>
+                </a:solidFill>
+                <a:latin typeface="Arial" pitchFamily="34" charset="0"/>
+                <a:ea typeface="Arial" pitchFamily="34" charset="-122"/>
+                <a:cs typeface="Arial" pitchFamily="34" charset="-120"/>
+              </a:rPr>
+              <a:t>Bring </a:t>
             </a:r>
             <a:pPr algn="l" indent="0" marL="0">
               <a:lnSpc>
@@ -3305,6 +3863,26 @@
               <a:buNone/>
             </a:pPr>
             <a:r>
+              <a:rPr lang="en-US" sz="1200" b="1" dirty="0">
+                <a:solidFill>
+                  <a:srgbClr val="1C2833"/>
+                </a:solidFill>
+                <a:latin typeface="Arial" pitchFamily="34" charset="0"/>
+                <a:ea typeface="Arial" pitchFamily="34" charset="-122"/>
+                <a:cs typeface="Arial" pitchFamily="34" charset="-120"/>
+              </a:rPr>
+              <a:t>all</a:t>
+            </a:r>
+            <a:pPr algn="l" indent="0" marL="0">
+              <a:lnSpc>
+                <a:spcPts val="1620"/>
+              </a:lnSpc>
+              <a:spcAft>
+                <a:spcPts val="300"/>
+              </a:spcAft>
+              <a:buNone/>
+            </a:pPr>
+            <a:r>
               <a:rPr lang="en-US" sz="1200" dirty="0">
                 <a:solidFill>
                   <a:srgbClr val="1C2833"/>
@@ -3313,7 +3891,31 @@
                 <a:ea typeface="Arial" pitchFamily="34" charset="-122"/>
                 <a:cs typeface="Arial" pitchFamily="34" charset="-120"/>
               </a:rPr>
-              <a:t> is foreshadowed but not cited. Save full sourcing for Module 13.</a:t>
+              <a:t> project materials to tomorrow's session. The work begins in earnest.</a:t>
+            </a:r>
+            <a:endParaRPr lang="en-US" sz="1200" dirty="0"/>
+          </a:p>
+          <a:p>
+            <a:pPr algn="l" marL="342900" indent="-342900">
+              <a:lnSpc>
+                <a:spcPts val="1620"/>
+              </a:lnSpc>
+              <a:spcAft>
+                <a:spcPts val="300"/>
+              </a:spcAft>
+              <a:buSzPct val="100000"/>
+              <a:buChar char="•"/>
+            </a:pPr>
+            <a:r>
+              <a:rPr lang="en-US" sz="1200" dirty="0">
+                <a:solidFill>
+                  <a:srgbClr val="1C2833"/>
+                </a:solidFill>
+                <a:latin typeface="Arial" pitchFamily="34" charset="0"/>
+                <a:ea typeface="Arial" pitchFamily="34" charset="-122"/>
+                <a:cs typeface="Arial" pitchFamily="34" charset="-120"/>
+              </a:rPr>
+              <a:t>For your project, consider: is there a small element of "imbalance" worth showing alongside the element's main story?</a:t>
             </a:r>
             <a:endParaRPr lang="en-US" sz="1200" dirty="0"/>
           </a:p>
@@ -3327,7 +3929,7 @@
         </p:nvSpPr>
         <p:spPr>
           <a:xfrm>
-            <a:off x="406301" y="1254323"/>
+            <a:off x="406301" y="4434929"/>
             <a:ext cx="8498026" cy="213271"/>
           </a:xfrm>
           <a:prstGeom prst="rect">
@@ -3361,15 +3963,775 @@
                 <a:ea typeface="Arial" pitchFamily="34" charset="-122"/>
                 <a:cs typeface="Arial" pitchFamily="34" charset="-120"/>
               </a:rPr>
-              <a:t>– No new RAG citations.</a:t>
+              <a:t>Middle ·  · IKS Curriculum</a:t>
             </a:r>
             <a:endParaRPr lang="en-US" sz="1200" dirty="0"/>
           </a:p>
         </p:txBody>
       </p:sp>
-      <p:sp>
-        <p:nvSpPr>
-          <p:cNvPr id="6" name="Text 4"/>
+    </p:spTree>
+  </p:cSld>
+  <p:clrMapOvr>
+    <a:masterClrMapping/>
+  </p:clrMapOvr>
+</p:sld>
+</file>
+
+<file path=ppt/slides/slide14.xml><?xml version="1.0" encoding="utf-8"?>
+<p:sld xmlns:a="http://schemas.openxmlformats.org/drawingml/2006/main" xmlns:r="http://schemas.openxmlformats.org/officeDocument/2006/relationships" xmlns:p="http://schemas.openxmlformats.org/presentationml/2006/main">
+  <p:cSld name="Slide 14">
+    <p:bg>
+      <p:bgPr>
+        <a:solidFill>
+          <a:srgbClr val="FFFFFF"/>
+        </a:solidFill>
+      </p:bgPr>
+    </p:bg>
+    <p:spTree>
+      <p:nvGrpSpPr>
+        <p:cNvPr id="1" name=""/>
+        <p:cNvGrpSpPr/>
+        <p:nvPr/>
+      </p:nvGrpSpPr>
+      <p:grpSpPr>
+        <a:xfrm>
+          <a:off x="0" y="0"/>
+          <a:ext cx="0" cy="0"/>
+          <a:chOff x="0" y="0"/>
+          <a:chExt cx="0" cy="0"/>
+        </a:xfrm>
+      </p:grpSpPr>
+      <p:sp>
+        <p:nvSpPr>
+          <p:cNvPr id="2" name="Text 0"/>
+          <p:cNvSpPr/>
+          <p:nvPr/>
+        </p:nvSpPr>
+        <p:spPr>
+          <a:xfrm>
+            <a:off x="0" y="0"/>
+            <a:ext cx="9144000" cy="101501"/>
+          </a:xfrm>
+          <a:prstGeom prst="rect">
+            <a:avLst/>
+          </a:prstGeom>
+          <a:solidFill>
+            <a:srgbClr val="277884"/>
+          </a:solidFill>
+          <a:ln/>
+        </p:spPr>
+        <p:txBody>
+          <a:bodyPr wrap="square" rtlCol="0" anchor="ctr"/>
+          <a:lstStyle/>
+          <a:p>
+            <a:pPr indent="0" marL="0">
+              <a:buNone/>
+            </a:pPr>
+            <a:endParaRPr lang="en-US" dirty="0"/>
+          </a:p>
+        </p:txBody>
+      </p:sp>
+      <p:sp>
+        <p:nvSpPr>
+          <p:cNvPr id="3" name="Text 1"/>
+          <p:cNvSpPr/>
+          <p:nvPr/>
+        </p:nvSpPr>
+        <p:spPr>
+          <a:xfrm>
+            <a:off x="406301" y="457051"/>
+            <a:ext cx="8498026" cy="274290"/>
+          </a:xfrm>
+          <a:prstGeom prst="rect">
+            <a:avLst/>
+          </a:prstGeom>
+          <a:noFill/>
+          <a:ln/>
+        </p:spPr>
+        <p:txBody>
+          <a:bodyPr wrap="square" lIns="0" tIns="0" rIns="0" bIns="0" rtlCol="0" anchor="t"/>
+          <a:lstStyle/>
+          <a:p>
+            <a:pPr algn="l" indent="0" marL="0">
+              <a:lnSpc>
+                <a:spcPts val="2160"/>
+              </a:lnSpc>
+              <a:spcBef>
+                <a:spcPts val="600"/>
+              </a:spcBef>
+              <a:spcAft>
+                <a:spcPts val="800"/>
+              </a:spcAft>
+              <a:buNone/>
+            </a:pPr>
+            <a:r>
+              <a:rPr lang="en-US" sz="1800" b="1" dirty="0">
+                <a:solidFill>
+                  <a:srgbClr val="FE4447"/>
+                </a:solidFill>
+                <a:latin typeface="Georgia" pitchFamily="34" charset="0"/>
+                <a:ea typeface="Georgia" pitchFamily="34" charset="-122"/>
+                <a:cs typeface="Georgia" pitchFamily="34" charset="-120"/>
+              </a:rPr>
+              <a:t>Differentiation</a:t>
+            </a:r>
+            <a:endParaRPr lang="en-US" sz="1800" dirty="0"/>
+          </a:p>
+        </p:txBody>
+      </p:sp>
+      <p:sp>
+        <p:nvSpPr>
+          <p:cNvPr id="4" name="Text 2"/>
+          <p:cNvSpPr/>
+          <p:nvPr/>
+        </p:nvSpPr>
+        <p:spPr>
+          <a:xfrm>
+            <a:off x="634901" y="883593"/>
+            <a:ext cx="8102798" cy="731341"/>
+          </a:xfrm>
+          <a:prstGeom prst="rect">
+            <a:avLst/>
+          </a:prstGeom>
+          <a:noFill/>
+          <a:ln/>
+        </p:spPr>
+        <p:txBody>
+          <a:bodyPr wrap="square" lIns="0" tIns="0" rIns="0" bIns="0" rtlCol="0" anchor="t"/>
+          <a:lstStyle/>
+          <a:p>
+            <a:pPr algn="l" marL="342900" indent="-342900">
+              <a:lnSpc>
+                <a:spcPts val="1620"/>
+              </a:lnSpc>
+              <a:spcAft>
+                <a:spcPts val="300"/>
+              </a:spcAft>
+              <a:buSzPct val="100000"/>
+              <a:buChar char="•"/>
+            </a:pPr>
+            <a:r>
+              <a:rPr lang="en-US" sz="1200" b="1" dirty="0">
+                <a:solidFill>
+                  <a:srgbClr val="1C2833"/>
+                </a:solidFill>
+                <a:latin typeface="Arial" pitchFamily="34" charset="0"/>
+                <a:ea typeface="Arial" pitchFamily="34" charset="-122"/>
+                <a:cs typeface="Arial" pitchFamily="34" charset="-120"/>
+              </a:rPr>
+              <a:t>One tier up:</a:t>
+            </a:r>
+            <a:pPr algn="l" indent="0" marL="0">
+              <a:lnSpc>
+                <a:spcPts val="1620"/>
+              </a:lnSpc>
+              <a:spcAft>
+                <a:spcPts val="300"/>
+              </a:spcAft>
+              <a:buNone/>
+            </a:pPr>
+            <a:r>
+              <a:rPr lang="en-US" sz="1200" dirty="0">
+                <a:solidFill>
+                  <a:srgbClr val="1C2833"/>
+                </a:solidFill>
+                <a:latin typeface="Arial" pitchFamily="34" charset="0"/>
+                <a:ea typeface="Arial" pitchFamily="34" charset="-122"/>
+                <a:cs typeface="Arial" pitchFamily="34" charset="-120"/>
+              </a:rPr>
+              <a:t> Pick TWO elements and explain how an imbalance in one causes an imbalance in the other. Be specific.</a:t>
+            </a:r>
+            <a:endParaRPr lang="en-US" sz="1200" dirty="0"/>
+          </a:p>
+          <a:p>
+            <a:pPr algn="l" marL="342900" indent="-342900">
+              <a:lnSpc>
+                <a:spcPts val="1620"/>
+              </a:lnSpc>
+              <a:spcAft>
+                <a:spcPts val="300"/>
+              </a:spcAft>
+              <a:buSzPct val="100000"/>
+              <a:buChar char="•"/>
+            </a:pPr>
+            <a:r>
+              <a:rPr lang="en-US" sz="1200" b="1" dirty="0">
+                <a:solidFill>
+                  <a:srgbClr val="1C2833"/>
+                </a:solidFill>
+                <a:latin typeface="Arial" pitchFamily="34" charset="0"/>
+                <a:ea typeface="Arial" pitchFamily="34" charset="-122"/>
+                <a:cs typeface="Arial" pitchFamily="34" charset="-120"/>
+              </a:rPr>
+              <a:t>One tier down:</a:t>
+            </a:r>
+            <a:pPr algn="l" indent="0" marL="0">
+              <a:lnSpc>
+                <a:spcPts val="1620"/>
+              </a:lnSpc>
+              <a:spcAft>
+                <a:spcPts val="300"/>
+              </a:spcAft>
+              <a:buNone/>
+            </a:pPr>
+            <a:r>
+              <a:rPr lang="en-US" sz="1200" dirty="0">
+                <a:solidFill>
+                  <a:srgbClr val="1C2833"/>
+                </a:solidFill>
+                <a:latin typeface="Arial" pitchFamily="34" charset="0"/>
+                <a:ea typeface="Arial" pitchFamily="34" charset="-122"/>
+                <a:cs typeface="Arial" pitchFamily="34" charset="-120"/>
+              </a:rPr>
+              <a:t> Focus on choosing ONE concrete action you can commit to this week (carry a water bottle to reduce plastic, switch off lights when leaving a room, etc.). The systems-thinking can come later.</a:t>
+            </a:r>
+            <a:endParaRPr lang="en-US" sz="1200" dirty="0"/>
+          </a:p>
+        </p:txBody>
+      </p:sp>
+      <p:sp>
+        <p:nvSpPr>
+          <p:cNvPr id="5" name="Text 3"/>
+          <p:cNvSpPr/>
+          <p:nvPr/>
+        </p:nvSpPr>
+        <p:spPr>
+          <a:xfrm>
+            <a:off x="406301" y="4434929"/>
+            <a:ext cx="8498026" cy="213271"/>
+          </a:xfrm>
+          <a:prstGeom prst="rect">
+            <a:avLst/>
+          </a:prstGeom>
+          <a:noFill/>
+          <a:ln/>
+        </p:spPr>
+        <p:txBody>
+          <a:bodyPr wrap="square" lIns="0" tIns="0" rIns="0" bIns="0" rtlCol="0" anchor="t"/>
+          <a:lstStyle/>
+          <a:p>
+            <a:pPr algn="l" indent="0" marL="0">
+              <a:lnSpc>
+                <a:spcPts val="1680"/>
+              </a:lnSpc>
+              <a:spcBef>
+                <a:spcPts val="300"/>
+              </a:spcBef>
+              <a:spcAft>
+                <a:spcPts val="300"/>
+              </a:spcAft>
+              <a:buNone/>
+            </a:pPr>
+            <a:r>
+              <a:rPr lang="en-US" sz="1200" dirty="0">
+                <a:solidFill>
+                  <a:srgbClr val="1C2833"/>
+                </a:solidFill>
+                <a:latin typeface="Arial" pitchFamily="34" charset="0"/>
+                <a:ea typeface="Arial" pitchFamily="34" charset="-122"/>
+                <a:cs typeface="Arial" pitchFamily="34" charset="-120"/>
+              </a:rPr>
+              <a:t>Middle ·  · IKS Curriculum</a:t>
+            </a:r>
+            <a:endParaRPr lang="en-US" sz="1200" dirty="0"/>
+          </a:p>
+        </p:txBody>
+      </p:sp>
+    </p:spTree>
+  </p:cSld>
+  <p:clrMapOvr>
+    <a:masterClrMapping/>
+  </p:clrMapOvr>
+</p:sld>
+</file>
+
+<file path=ppt/slides/slide15.xml><?xml version="1.0" encoding="utf-8"?>
+<p:sld xmlns:a="http://schemas.openxmlformats.org/drawingml/2006/main" xmlns:r="http://schemas.openxmlformats.org/officeDocument/2006/relationships" xmlns:p="http://schemas.openxmlformats.org/presentationml/2006/main">
+  <p:cSld name="Slide 15">
+    <p:bg>
+      <p:bgPr>
+        <a:solidFill>
+          <a:srgbClr val="FFFFFF"/>
+        </a:solidFill>
+      </p:bgPr>
+    </p:bg>
+    <p:spTree>
+      <p:nvGrpSpPr>
+        <p:cNvPr id="1" name=""/>
+        <p:cNvGrpSpPr/>
+        <p:nvPr/>
+      </p:nvGrpSpPr>
+      <p:grpSpPr>
+        <a:xfrm>
+          <a:off x="0" y="0"/>
+          <a:ext cx="0" cy="0"/>
+          <a:chOff x="0" y="0"/>
+          <a:chExt cx="0" cy="0"/>
+        </a:xfrm>
+      </p:grpSpPr>
+      <p:sp>
+        <p:nvSpPr>
+          <p:cNvPr id="2" name="Text 0"/>
+          <p:cNvSpPr/>
+          <p:nvPr/>
+        </p:nvSpPr>
+        <p:spPr>
+          <a:xfrm>
+            <a:off x="0" y="0"/>
+            <a:ext cx="9144000" cy="101501"/>
+          </a:xfrm>
+          <a:prstGeom prst="rect">
+            <a:avLst/>
+          </a:prstGeom>
+          <a:solidFill>
+            <a:srgbClr val="277884"/>
+          </a:solidFill>
+          <a:ln/>
+        </p:spPr>
+        <p:txBody>
+          <a:bodyPr wrap="square" rtlCol="0" anchor="ctr"/>
+          <a:lstStyle/>
+          <a:p>
+            <a:pPr indent="0" marL="0">
+              <a:buNone/>
+            </a:pPr>
+            <a:endParaRPr lang="en-US" dirty="0"/>
+          </a:p>
+        </p:txBody>
+      </p:sp>
+      <p:sp>
+        <p:nvSpPr>
+          <p:cNvPr id="3" name="Text 1"/>
+          <p:cNvSpPr/>
+          <p:nvPr/>
+        </p:nvSpPr>
+        <p:spPr>
+          <a:xfrm>
+            <a:off x="406301" y="457051"/>
+            <a:ext cx="8498026" cy="274290"/>
+          </a:xfrm>
+          <a:prstGeom prst="rect">
+            <a:avLst/>
+          </a:prstGeom>
+          <a:noFill/>
+          <a:ln/>
+        </p:spPr>
+        <p:txBody>
+          <a:bodyPr wrap="square" lIns="0" tIns="0" rIns="0" bIns="0" rtlCol="0" anchor="t"/>
+          <a:lstStyle/>
+          <a:p>
+            <a:pPr algn="l" indent="0" marL="0">
+              <a:lnSpc>
+                <a:spcPts val="2160"/>
+              </a:lnSpc>
+              <a:spcBef>
+                <a:spcPts val="600"/>
+              </a:spcBef>
+              <a:spcAft>
+                <a:spcPts val="800"/>
+              </a:spcAft>
+              <a:buNone/>
+            </a:pPr>
+            <a:r>
+              <a:rPr lang="en-US" sz="1800" b="1" dirty="0">
+                <a:solidFill>
+                  <a:srgbClr val="FE4447"/>
+                </a:solidFill>
+                <a:latin typeface="Georgia" pitchFamily="34" charset="0"/>
+                <a:ea typeface="Georgia" pitchFamily="34" charset="-122"/>
+                <a:cs typeface="Georgia" pitchFamily="34" charset="-120"/>
+              </a:rPr>
+              <a:t>Teacher notes</a:t>
+            </a:r>
+            <a:endParaRPr lang="en-US" sz="1800" dirty="0"/>
+          </a:p>
+        </p:txBody>
+      </p:sp>
+      <p:sp>
+        <p:nvSpPr>
+          <p:cNvPr id="4" name="Text 2"/>
+          <p:cNvSpPr/>
+          <p:nvPr/>
+        </p:nvSpPr>
+        <p:spPr>
+          <a:xfrm>
+            <a:off x="634901" y="883593"/>
+            <a:ext cx="8102798" cy="1386483"/>
+          </a:xfrm>
+          <a:prstGeom prst="rect">
+            <a:avLst/>
+          </a:prstGeom>
+          <a:noFill/>
+          <a:ln/>
+        </p:spPr>
+        <p:txBody>
+          <a:bodyPr wrap="square" lIns="0" tIns="0" rIns="0" bIns="0" rtlCol="0" anchor="t"/>
+          <a:lstStyle/>
+          <a:p>
+            <a:pPr algn="l" marL="342900" indent="-342900">
+              <a:lnSpc>
+                <a:spcPts val="1620"/>
+              </a:lnSpc>
+              <a:spcAft>
+                <a:spcPts val="300"/>
+              </a:spcAft>
+              <a:buSzPct val="100000"/>
+              <a:buChar char="•"/>
+            </a:pPr>
+            <a:r>
+              <a:rPr lang="en-US" sz="1200" dirty="0">
+                <a:solidFill>
+                  <a:srgbClr val="1C2833"/>
+                </a:solidFill>
+                <a:latin typeface="Arial" pitchFamily="34" charset="0"/>
+                <a:ea typeface="Arial" pitchFamily="34" charset="-122"/>
+                <a:cs typeface="Arial" pitchFamily="34" charset="-120"/>
+              </a:rPr>
+              <a:t>This lesson connects to NEP §11.8 (multidisciplinary linkage) and is a natural lead-in to Module 13 (Indic Ecology) when the time comes.</a:t>
+            </a:r>
+            <a:endParaRPr lang="en-US" sz="1200" dirty="0"/>
+          </a:p>
+          <a:p>
+            <a:pPr algn="l" marL="342900" indent="-342900">
+              <a:lnSpc>
+                <a:spcPts val="1620"/>
+              </a:lnSpc>
+              <a:spcAft>
+                <a:spcPts val="300"/>
+              </a:spcAft>
+              <a:buSzPct val="100000"/>
+              <a:buChar char="•"/>
+            </a:pPr>
+            <a:r>
+              <a:rPr lang="en-US" sz="1200" dirty="0">
+                <a:solidFill>
+                  <a:srgbClr val="1C2833"/>
+                </a:solidFill>
+                <a:latin typeface="Arial" pitchFamily="34" charset="0"/>
+                <a:ea typeface="Arial" pitchFamily="34" charset="-122"/>
+                <a:cs typeface="Arial" pitchFamily="34" charset="-120"/>
+              </a:rPr>
+              <a:t>Some students may feel discouraged by the scale of the problems. Don't soften the reality, but anchor every imbalance to a doable response. The point is agency, not despair.</a:t>
+            </a:r>
+            <a:endParaRPr lang="en-US" sz="1200" dirty="0"/>
+          </a:p>
+          <a:p>
+            <a:pPr algn="l" marL="342900" indent="-342900">
+              <a:lnSpc>
+                <a:spcPts val="1620"/>
+              </a:lnSpc>
+              <a:spcAft>
+                <a:spcPts val="300"/>
+              </a:spcAft>
+              <a:buSzPct val="100000"/>
+              <a:buChar char="•"/>
+            </a:pPr>
+            <a:r>
+              <a:rPr lang="en-US" sz="1200" dirty="0">
+                <a:solidFill>
+                  <a:srgbClr val="1C2833"/>
+                </a:solidFill>
+                <a:latin typeface="Arial" pitchFamily="34" charset="0"/>
+                <a:ea typeface="Arial" pitchFamily="34" charset="-122"/>
+                <a:cs typeface="Arial" pitchFamily="34" charset="-120"/>
+              </a:rPr>
+              <a:t>If your school is in a location with a </a:t>
+            </a:r>
+            <a:pPr algn="l" indent="0" marL="0">
+              <a:lnSpc>
+                <a:spcPts val="1620"/>
+              </a:lnSpc>
+              <a:spcAft>
+                <a:spcPts val="300"/>
+              </a:spcAft>
+              <a:buNone/>
+            </a:pPr>
+            <a:r>
+              <a:rPr lang="en-US" sz="1200" i="1" dirty="0">
+                <a:solidFill>
+                  <a:srgbClr val="1C2833"/>
+                </a:solidFill>
+                <a:latin typeface="Arial" pitchFamily="34" charset="0"/>
+                <a:ea typeface="Arial" pitchFamily="34" charset="-122"/>
+                <a:cs typeface="Arial" pitchFamily="34" charset="-120"/>
+              </a:rPr>
+              <a:t>specific</a:t>
+            </a:r>
+            <a:pPr algn="l" indent="0" marL="0">
+              <a:lnSpc>
+                <a:spcPts val="1620"/>
+              </a:lnSpc>
+              <a:spcAft>
+                <a:spcPts val="300"/>
+              </a:spcAft>
+              <a:buNone/>
+            </a:pPr>
+            <a:r>
+              <a:rPr lang="en-US" sz="1200" dirty="0">
+                <a:solidFill>
+                  <a:srgbClr val="1C2833"/>
+                </a:solidFill>
+                <a:latin typeface="Arial" pitchFamily="34" charset="0"/>
+                <a:ea typeface="Arial" pitchFamily="34" charset="-122"/>
+                <a:cs typeface="Arial" pitchFamily="34" charset="-120"/>
+              </a:rPr>
+              <a:t> well-known environmental issue (e.g. a polluted river, a heavily quarried hillside), centre that as the case study and skip the air-pollution example.</a:t>
+            </a:r>
+            <a:endParaRPr lang="en-US" sz="1200" dirty="0"/>
+          </a:p>
+        </p:txBody>
+      </p:sp>
+      <p:sp>
+        <p:nvSpPr>
+          <p:cNvPr id="5" name="Text 3"/>
+          <p:cNvSpPr/>
+          <p:nvPr/>
+        </p:nvSpPr>
+        <p:spPr>
+          <a:xfrm>
+            <a:off x="406301" y="4434929"/>
+            <a:ext cx="8498026" cy="213271"/>
+          </a:xfrm>
+          <a:prstGeom prst="rect">
+            <a:avLst/>
+          </a:prstGeom>
+          <a:noFill/>
+          <a:ln/>
+        </p:spPr>
+        <p:txBody>
+          <a:bodyPr wrap="square" lIns="0" tIns="0" rIns="0" bIns="0" rtlCol="0" anchor="t"/>
+          <a:lstStyle/>
+          <a:p>
+            <a:pPr algn="l" indent="0" marL="0">
+              <a:lnSpc>
+                <a:spcPts val="1680"/>
+              </a:lnSpc>
+              <a:spcBef>
+                <a:spcPts val="300"/>
+              </a:spcBef>
+              <a:spcAft>
+                <a:spcPts val="300"/>
+              </a:spcAft>
+              <a:buNone/>
+            </a:pPr>
+            <a:r>
+              <a:rPr lang="en-US" sz="1200" dirty="0">
+                <a:solidFill>
+                  <a:srgbClr val="1C2833"/>
+                </a:solidFill>
+                <a:latin typeface="Arial" pitchFamily="34" charset="0"/>
+                <a:ea typeface="Arial" pitchFamily="34" charset="-122"/>
+                <a:cs typeface="Arial" pitchFamily="34" charset="-120"/>
+              </a:rPr>
+              <a:t>Middle ·  · IKS Curriculum</a:t>
+            </a:r>
+            <a:endParaRPr lang="en-US" sz="1200" dirty="0"/>
+          </a:p>
+        </p:txBody>
+      </p:sp>
+    </p:spTree>
+  </p:cSld>
+  <p:clrMapOvr>
+    <a:masterClrMapping/>
+  </p:clrMapOvr>
+</p:sld>
+</file>
+
+<file path=ppt/slides/slide16.xml><?xml version="1.0" encoding="utf-8"?>
+<p:sld xmlns:a="http://schemas.openxmlformats.org/drawingml/2006/main" xmlns:r="http://schemas.openxmlformats.org/officeDocument/2006/relationships" xmlns:p="http://schemas.openxmlformats.org/presentationml/2006/main">
+  <p:cSld name="Slide 16">
+    <p:bg>
+      <p:bgPr>
+        <a:solidFill>
+          <a:srgbClr val="FFFFFF"/>
+        </a:solidFill>
+      </p:bgPr>
+    </p:bg>
+    <p:spTree>
+      <p:nvGrpSpPr>
+        <p:cNvPr id="1" name=""/>
+        <p:cNvGrpSpPr/>
+        <p:nvPr/>
+      </p:nvGrpSpPr>
+      <p:grpSpPr>
+        <a:xfrm>
+          <a:off x="0" y="0"/>
+          <a:ext cx="0" cy="0"/>
+          <a:chOff x="0" y="0"/>
+          <a:chExt cx="0" cy="0"/>
+        </a:xfrm>
+      </p:grpSpPr>
+      <p:sp>
+        <p:nvSpPr>
+          <p:cNvPr id="2" name="Text 0"/>
+          <p:cNvSpPr/>
+          <p:nvPr/>
+        </p:nvSpPr>
+        <p:spPr>
+          <a:xfrm>
+            <a:off x="0" y="0"/>
+            <a:ext cx="9144000" cy="101501"/>
+          </a:xfrm>
+          <a:prstGeom prst="rect">
+            <a:avLst/>
+          </a:prstGeom>
+          <a:solidFill>
+            <a:srgbClr val="277884"/>
+          </a:solidFill>
+          <a:ln/>
+        </p:spPr>
+        <p:txBody>
+          <a:bodyPr wrap="square" rtlCol="0" anchor="ctr"/>
+          <a:lstStyle/>
+          <a:p>
+            <a:pPr indent="0" marL="0">
+              <a:buNone/>
+            </a:pPr>
+            <a:endParaRPr lang="en-US" dirty="0"/>
+          </a:p>
+        </p:txBody>
+      </p:sp>
+      <p:sp>
+        <p:nvSpPr>
+          <p:cNvPr id="3" name="Text 1"/>
+          <p:cNvSpPr/>
+          <p:nvPr/>
+        </p:nvSpPr>
+        <p:spPr>
+          <a:xfrm>
+            <a:off x="406301" y="457051"/>
+            <a:ext cx="8498026" cy="274290"/>
+          </a:xfrm>
+          <a:prstGeom prst="rect">
+            <a:avLst/>
+          </a:prstGeom>
+          <a:noFill/>
+          <a:ln/>
+        </p:spPr>
+        <p:txBody>
+          <a:bodyPr wrap="square" lIns="0" tIns="0" rIns="0" bIns="0" rtlCol="0" anchor="t"/>
+          <a:lstStyle/>
+          <a:p>
+            <a:pPr algn="l" indent="0" marL="0">
+              <a:lnSpc>
+                <a:spcPts val="2160"/>
+              </a:lnSpc>
+              <a:spcBef>
+                <a:spcPts val="600"/>
+              </a:spcBef>
+              <a:spcAft>
+                <a:spcPts val="800"/>
+              </a:spcAft>
+              <a:buNone/>
+            </a:pPr>
+            <a:r>
+              <a:rPr lang="en-US" sz="1800" b="1" dirty="0">
+                <a:solidFill>
+                  <a:srgbClr val="FE4447"/>
+                </a:solidFill>
+                <a:latin typeface="Georgia" pitchFamily="34" charset="0"/>
+                <a:ea typeface="Georgia" pitchFamily="34" charset="-122"/>
+                <a:cs typeface="Georgia" pitchFamily="34" charset="-120"/>
+              </a:rPr>
+              <a:t>Citation(s) used in this lesson</a:t>
+            </a:r>
+            <a:endParaRPr lang="en-US" sz="1800" dirty="0"/>
+          </a:p>
+        </p:txBody>
+      </p:sp>
+      <p:sp>
+        <p:nvSpPr>
+          <p:cNvPr id="4" name="Text 2"/>
+          <p:cNvSpPr/>
+          <p:nvPr/>
+        </p:nvSpPr>
+        <p:spPr>
+          <a:xfrm>
+            <a:off x="634901" y="883593"/>
+            <a:ext cx="8102798" cy="525661"/>
+          </a:xfrm>
+          <a:prstGeom prst="rect">
+            <a:avLst/>
+          </a:prstGeom>
+          <a:noFill/>
+          <a:ln/>
+        </p:spPr>
+        <p:txBody>
+          <a:bodyPr wrap="square" lIns="0" tIns="0" rIns="0" bIns="0" rtlCol="0" anchor="t"/>
+          <a:lstStyle/>
+          <a:p>
+            <a:pPr algn="l" marL="342900" indent="-342900">
+              <a:lnSpc>
+                <a:spcPts val="1620"/>
+              </a:lnSpc>
+              <a:spcAft>
+                <a:spcPts val="300"/>
+              </a:spcAft>
+              <a:buSzPct val="100000"/>
+              <a:buChar char="•"/>
+            </a:pPr>
+            <a:r>
+              <a:rPr lang="en-US" sz="1200" i="1" dirty="0">
+                <a:solidFill>
+                  <a:srgbClr val="1C2833"/>
+                </a:solidFill>
+                <a:latin typeface="Arial" pitchFamily="34" charset="0"/>
+                <a:ea typeface="Arial" pitchFamily="34" charset="-122"/>
+                <a:cs typeface="Arial" pitchFamily="34" charset="-120"/>
+              </a:rPr>
+              <a:t>Vasudhaiva Kuṭumbakam</a:t>
+            </a:r>
+            <a:pPr algn="l" indent="0" marL="0">
+              <a:lnSpc>
+                <a:spcPts val="1620"/>
+              </a:lnSpc>
+              <a:spcAft>
+                <a:spcPts val="300"/>
+              </a:spcAft>
+              <a:buNone/>
+            </a:pPr>
+            <a:r>
+              <a:rPr lang="en-US" sz="1200" dirty="0">
+                <a:solidFill>
+                  <a:srgbClr val="1C2833"/>
+                </a:solidFill>
+                <a:latin typeface="Arial" pitchFamily="34" charset="0"/>
+                <a:ea typeface="Arial" pitchFamily="34" charset="-122"/>
+                <a:cs typeface="Arial" pitchFamily="34" charset="-120"/>
+              </a:rPr>
+              <a:t> is foreshadowed but not cited. Save full sourcing for Module 13.</a:t>
+            </a:r>
+            <a:endParaRPr lang="en-US" sz="1200" dirty="0"/>
+          </a:p>
+          <a:p>
+            <a:pPr algn="l" marL="342900" indent="-342900">
+              <a:lnSpc>
+                <a:spcPts val="1620"/>
+              </a:lnSpc>
+              <a:spcAft>
+                <a:spcPts val="300"/>
+              </a:spcAft>
+              <a:buSzPct val="100000"/>
+              <a:buChar char="•"/>
+            </a:pPr>
+            <a:r>
+              <a:rPr lang="en-US" sz="1200" dirty="0">
+                <a:solidFill>
+                  <a:srgbClr val="1C2833"/>
+                </a:solidFill>
+                <a:latin typeface="Arial" pitchFamily="34" charset="0"/>
+                <a:ea typeface="Arial" pitchFamily="34" charset="-122"/>
+                <a:cs typeface="Arial" pitchFamily="34" charset="-120"/>
+              </a:rPr>
+              <a:t>No new RAG citations.</a:t>
+            </a:r>
+            <a:endParaRPr lang="en-US" sz="1200" dirty="0"/>
+          </a:p>
+        </p:txBody>
+      </p:sp>
+      <p:sp>
+        <p:nvSpPr>
+          <p:cNvPr id="5" name="Text 3"/>
           <p:cNvSpPr/>
           <p:nvPr/>
         </p:nvSpPr>
@@ -3519,7 +4881,7 @@
                 <a:ea typeface="Georgia" pitchFamily="34" charset="-122"/>
                 <a:cs typeface="Georgia" pitchFamily="34" charset="-120"/>
               </a:rPr>
-              <a:t>Materials</a:t>
+              <a:t>Learning objective</a:t>
             </a:r>
             <a:endParaRPr lang="en-US" sz="1800" dirty="0"/>
           </a:p>
@@ -3534,7 +4896,7 @@
         <p:spPr>
           <a:xfrm>
             <a:off x="406301" y="870942"/>
-            <a:ext cx="8498026" cy="639812"/>
+            <a:ext cx="8498026" cy="426541"/>
           </a:xfrm>
           <a:prstGeom prst="rect">
             <a:avLst/>
@@ -3567,7 +4929,53 @@
                 <a:ea typeface="Arial" pitchFamily="34" charset="-122"/>
                 <a:cs typeface="Arial" pitchFamily="34" charset="-120"/>
               </a:rPr>
-              <a:t>– 5 large pieces of chart paper, one labelled with each element. – Sticky notes (~30) per group. – Markers. – Optional: 3–5 short newspaper clippings about local environmental issues (air quality, water shortage, waste/landfill, heatwave, deforestation).</a:t>
+              <a:t>By the end of this lesson, students will identify a real local example of one </a:t>
+            </a:r>
+            <a:pPr algn="l" indent="0" marL="0">
+              <a:lnSpc>
+                <a:spcPts val="1680"/>
+              </a:lnSpc>
+              <a:spcBef>
+                <a:spcPts val="300"/>
+              </a:spcBef>
+              <a:spcAft>
+                <a:spcPts val="300"/>
+              </a:spcAft>
+              <a:buNone/>
+            </a:pPr>
+            <a:r>
+              <a:rPr lang="en-US" sz="1200" i="1" dirty="0">
+                <a:solidFill>
+                  <a:srgbClr val="1C2833"/>
+                </a:solidFill>
+                <a:latin typeface="Arial" pitchFamily="34" charset="0"/>
+                <a:ea typeface="Arial" pitchFamily="34" charset="-122"/>
+                <a:cs typeface="Arial" pitchFamily="34" charset="-120"/>
+              </a:rPr>
+              <a:t>pañcabhūta</a:t>
+            </a:r>
+            <a:pPr algn="l" indent="0" marL="0">
+              <a:lnSpc>
+                <a:spcPts val="1680"/>
+              </a:lnSpc>
+              <a:spcBef>
+                <a:spcPts val="300"/>
+              </a:spcBef>
+              <a:spcAft>
+                <a:spcPts val="300"/>
+              </a:spcAft>
+              <a:buNone/>
+            </a:pPr>
+            <a:r>
+              <a:rPr lang="en-US" sz="1200" dirty="0">
+                <a:solidFill>
+                  <a:srgbClr val="1C2833"/>
+                </a:solidFill>
+                <a:latin typeface="Arial" pitchFamily="34" charset="0"/>
+                <a:ea typeface="Arial" pitchFamily="34" charset="-122"/>
+                <a:cs typeface="Arial" pitchFamily="34" charset="-120"/>
+              </a:rPr>
+              <a:t> being "out of balance" in their environment and propose one observable consequence and one mitigation action.</a:t>
             </a:r>
             <a:endParaRPr lang="en-US" sz="1200" dirty="0"/>
           </a:p>
@@ -3725,7 +5133,7 @@
                 <a:ea typeface="Georgia" pitchFamily="34" charset="-122"/>
                 <a:cs typeface="Georgia" pitchFamily="34" charset="-120"/>
               </a:rPr>
-              <a:t>Vocabulary</a:t>
+              <a:t>Materials</a:t>
             </a:r>
             <a:endParaRPr lang="en-US" sz="1800" dirty="0"/>
           </a:p>
@@ -3739,8 +5147,8 @@
         </p:nvSpPr>
         <p:spPr>
           <a:xfrm>
-            <a:off x="406301" y="870942"/>
-            <a:ext cx="8498026" cy="213271"/>
+            <a:off x="634901" y="883593"/>
+            <a:ext cx="8102798" cy="1218902"/>
           </a:xfrm>
           <a:prstGeom prst="rect">
             <a:avLst/>
@@ -3752,17 +5160,15 @@
           <a:bodyPr wrap="square" lIns="0" tIns="0" rIns="0" bIns="0" rtlCol="0" anchor="t"/>
           <a:lstStyle/>
           <a:p>
-            <a:pPr algn="l" indent="0" marL="0">
-              <a:lnSpc>
-                <a:spcPts val="1680"/>
-              </a:lnSpc>
-              <a:spcBef>
-                <a:spcPts val="300"/>
-              </a:spcBef>
-              <a:spcAft>
-                <a:spcPts val="300"/>
-              </a:spcAft>
-              <a:buNone/>
+            <a:pPr algn="l" marL="342900" indent="-342900">
+              <a:lnSpc>
+                <a:spcPts val="1620"/>
+              </a:lnSpc>
+              <a:spcAft>
+                <a:spcPts val="300"/>
+              </a:spcAft>
+              <a:buSzPct val="100000"/>
+              <a:buChar char="•"/>
             </a:pPr>
             <a:r>
               <a:rPr lang="en-US" sz="1200" dirty="0">
@@ -3773,42 +5179,20 @@
                 <a:ea typeface="Arial" pitchFamily="34" charset="-122"/>
                 <a:cs typeface="Arial" pitchFamily="34" charset="-120"/>
               </a:rPr>
-              <a:t>– No new Sanskrit. Introduce the word </a:t>
-            </a:r>
-            <a:pPr algn="l" indent="0" marL="0">
-              <a:lnSpc>
-                <a:spcPts val="1680"/>
-              </a:lnSpc>
-              <a:spcBef>
-                <a:spcPts val="300"/>
-              </a:spcBef>
-              <a:spcAft>
-                <a:spcPts val="300"/>
-              </a:spcAft>
-              <a:buNone/>
-            </a:pPr>
-            <a:r>
-              <a:rPr lang="en-US" sz="1200" b="1" dirty="0">
-                <a:solidFill>
-                  <a:srgbClr val="1C2833"/>
-                </a:solidFill>
-                <a:latin typeface="Arial" pitchFamily="34" charset="0"/>
-                <a:ea typeface="Arial" pitchFamily="34" charset="-122"/>
-                <a:cs typeface="Arial" pitchFamily="34" charset="-120"/>
-              </a:rPr>
-              <a:t>imbalance</a:t>
-            </a:r>
-            <a:pPr algn="l" indent="0" marL="0">
-              <a:lnSpc>
-                <a:spcPts val="1680"/>
-              </a:lnSpc>
-              <a:spcBef>
-                <a:spcPts val="300"/>
-              </a:spcBef>
-              <a:spcAft>
-                <a:spcPts val="300"/>
-              </a:spcAft>
-              <a:buNone/>
+              <a:t>5 large pieces of chart paper, one labelled with each element.</a:t>
+            </a:r>
+            <a:endParaRPr lang="en-US" sz="1200" dirty="0"/>
+          </a:p>
+          <a:p>
+            <a:pPr algn="l" marL="342900" indent="-342900">
+              <a:lnSpc>
+                <a:spcPts val="1620"/>
+              </a:lnSpc>
+              <a:spcAft>
+                <a:spcPts val="300"/>
+              </a:spcAft>
+              <a:buSzPct val="100000"/>
+              <a:buChar char="•"/>
             </a:pPr>
             <a:r>
               <a:rPr lang="en-US" sz="1200" dirty="0">
@@ -3819,7 +5203,55 @@
                 <a:ea typeface="Arial" pitchFamily="34" charset="-122"/>
                 <a:cs typeface="Arial" pitchFamily="34" charset="-120"/>
               </a:rPr>
-              <a:t> as the operating concept of the day.</a:t>
+              <a:t>Sticky notes (~30) per group.</a:t>
+            </a:r>
+            <a:endParaRPr lang="en-US" sz="1200" dirty="0"/>
+          </a:p>
+          <a:p>
+            <a:pPr algn="l" marL="342900" indent="-342900">
+              <a:lnSpc>
+                <a:spcPts val="1620"/>
+              </a:lnSpc>
+              <a:spcAft>
+                <a:spcPts val="300"/>
+              </a:spcAft>
+              <a:buSzPct val="100000"/>
+              <a:buChar char="•"/>
+            </a:pPr>
+            <a:r>
+              <a:rPr lang="en-US" sz="1200" dirty="0">
+                <a:solidFill>
+                  <a:srgbClr val="1C2833"/>
+                </a:solidFill>
+                <a:latin typeface="Arial" pitchFamily="34" charset="0"/>
+                <a:ea typeface="Arial" pitchFamily="34" charset="-122"/>
+                <a:cs typeface="Arial" pitchFamily="34" charset="-120"/>
+              </a:rPr>
+              <a:t>Markers.</a:t>
+            </a:r>
+            <a:endParaRPr lang="en-US" sz="1200" dirty="0"/>
+          </a:p>
+          <a:p>
+            <a:pPr algn="l" marL="342900" indent="-342900">
+              <a:lnSpc>
+                <a:spcPts val="1620"/>
+              </a:lnSpc>
+              <a:spcAft>
+                <a:spcPts val="300"/>
+              </a:spcAft>
+              <a:buSzPct val="100000"/>
+              <a:buChar char="•"/>
+            </a:pPr>
+            <a:r>
+              <a:rPr lang="en-US" sz="1200" dirty="0">
+                <a:solidFill>
+                  <a:srgbClr val="1C2833"/>
+                </a:solidFill>
+                <a:latin typeface="Arial" pitchFamily="34" charset="0"/>
+                <a:ea typeface="Arial" pitchFamily="34" charset="-122"/>
+                <a:cs typeface="Arial" pitchFamily="34" charset="-120"/>
+              </a:rPr>
+              <a:t>Optional: 3–5 short newspaper clippings about local environmental issues (air quality, water shortage, waste/landfill, heatwave, deforestation).</a:t>
             </a:r>
             <a:endParaRPr lang="en-US" sz="1200" dirty="0"/>
           </a:p>
@@ -3977,7 +5409,7 @@
                 <a:ea typeface="Georgia" pitchFamily="34" charset="-122"/>
                 <a:cs typeface="Georgia" pitchFamily="34" charset="-120"/>
               </a:rPr>
-              <a:t>Lesson flow</a:t>
+              <a:t>Vocabulary</a:t>
             </a:r>
             <a:endParaRPr lang="en-US" sz="1800" dirty="0"/>
           </a:p>
@@ -3986,6 +5418,92 @@
       <p:sp>
         <p:nvSpPr>
           <p:cNvPr id="4" name="Text 2"/>
+          <p:cNvSpPr/>
+          <p:nvPr/>
+        </p:nvSpPr>
+        <p:spPr>
+          <a:xfrm>
+            <a:off x="634901" y="883593"/>
+            <a:ext cx="8102798" cy="281880"/>
+          </a:xfrm>
+          <a:prstGeom prst="rect">
+            <a:avLst/>
+          </a:prstGeom>
+          <a:noFill/>
+          <a:ln/>
+        </p:spPr>
+        <p:txBody>
+          <a:bodyPr wrap="square" lIns="0" tIns="0" rIns="0" bIns="0" rtlCol="0" anchor="t"/>
+          <a:lstStyle/>
+          <a:p>
+            <a:pPr algn="l" marL="342900" indent="-342900">
+              <a:lnSpc>
+                <a:spcPts val="1620"/>
+              </a:lnSpc>
+              <a:spcAft>
+                <a:spcPts val="300"/>
+              </a:spcAft>
+              <a:buSzPct val="100000"/>
+              <a:buChar char="•"/>
+            </a:pPr>
+            <a:r>
+              <a:rPr lang="en-US" sz="1200" dirty="0">
+                <a:solidFill>
+                  <a:srgbClr val="1C2833"/>
+                </a:solidFill>
+                <a:latin typeface="Arial" pitchFamily="34" charset="0"/>
+                <a:ea typeface="Arial" pitchFamily="34" charset="-122"/>
+                <a:cs typeface="Arial" pitchFamily="34" charset="-120"/>
+              </a:rPr>
+              <a:t>No new Sanskrit. Introduce the word </a:t>
+            </a:r>
+            <a:pPr algn="l" indent="0" marL="0">
+              <a:lnSpc>
+                <a:spcPts val="1620"/>
+              </a:lnSpc>
+              <a:spcAft>
+                <a:spcPts val="300"/>
+              </a:spcAft>
+              <a:buNone/>
+            </a:pPr>
+            <a:r>
+              <a:rPr lang="en-US" sz="1200" b="1" dirty="0">
+                <a:solidFill>
+                  <a:srgbClr val="1C2833"/>
+                </a:solidFill>
+                <a:latin typeface="Arial" pitchFamily="34" charset="0"/>
+                <a:ea typeface="Arial" pitchFamily="34" charset="-122"/>
+                <a:cs typeface="Arial" pitchFamily="34" charset="-120"/>
+              </a:rPr>
+              <a:t>imbalance</a:t>
+            </a:r>
+            <a:pPr algn="l" indent="0" marL="0">
+              <a:lnSpc>
+                <a:spcPts val="1620"/>
+              </a:lnSpc>
+              <a:spcAft>
+                <a:spcPts val="300"/>
+              </a:spcAft>
+              <a:buNone/>
+            </a:pPr>
+            <a:r>
+              <a:rPr lang="en-US" sz="1200" dirty="0">
+                <a:solidFill>
+                  <a:srgbClr val="1C2833"/>
+                </a:solidFill>
+                <a:latin typeface="Arial" pitchFamily="34" charset="0"/>
+                <a:ea typeface="Arial" pitchFamily="34" charset="-122"/>
+                <a:cs typeface="Arial" pitchFamily="34" charset="-120"/>
+              </a:rPr>
+              <a:t> as the operating concept of the day.</a:t>
+            </a:r>
+            <a:endParaRPr lang="en-US" sz="1200" dirty="0"/>
+          </a:p>
+        </p:txBody>
+      </p:sp>
+      <p:sp>
+        <p:nvSpPr>
+          <p:cNvPr id="5" name="Text 3"/>
           <p:cNvSpPr/>
           <p:nvPr/>
         </p:nvSpPr>
@@ -4135,7 +5653,7 @@
                 <a:ea typeface="Georgia" pitchFamily="34" charset="-122"/>
                 <a:cs typeface="Georgia" pitchFamily="34" charset="-120"/>
               </a:rPr>
-              <a:t>Warm-up (5 min)</a:t>
+              <a:t>Lesson flow</a:t>
             </a:r>
             <a:endParaRPr lang="en-US" sz="1800" dirty="0"/>
           </a:p>
@@ -4144,100 +5662,6 @@
       <p:sp>
         <p:nvSpPr>
           <p:cNvPr id="4" name="Text 2"/>
-          <p:cNvSpPr/>
-          <p:nvPr/>
-        </p:nvSpPr>
-        <p:spPr>
-          <a:xfrm>
-            <a:off x="406301" y="870942"/>
-            <a:ext cx="8498026" cy="213271"/>
-          </a:xfrm>
-          <a:prstGeom prst="rect">
-            <a:avLst/>
-          </a:prstGeom>
-          <a:noFill/>
-          <a:ln/>
-        </p:spPr>
-        <p:txBody>
-          <a:bodyPr wrap="square" lIns="0" tIns="0" rIns="0" bIns="0" rtlCol="0" anchor="t"/>
-          <a:lstStyle/>
-          <a:p>
-            <a:pPr algn="l" indent="0" marL="0">
-              <a:lnSpc>
-                <a:spcPts val="1680"/>
-              </a:lnSpc>
-              <a:spcBef>
-                <a:spcPts val="300"/>
-              </a:spcBef>
-              <a:spcAft>
-                <a:spcPts val="300"/>
-              </a:spcAft>
-              <a:buNone/>
-            </a:pPr>
-            <a:r>
-              <a:rPr lang="en-US" sz="1200" dirty="0">
-                <a:solidFill>
-                  <a:srgbClr val="1C2833"/>
-                </a:solidFill>
-                <a:latin typeface="Arial" pitchFamily="34" charset="0"/>
-                <a:ea typeface="Arial" pitchFamily="34" charset="-122"/>
-                <a:cs typeface="Arial" pitchFamily="34" charset="-120"/>
-              </a:rPr>
-              <a:t>– Daily prompt — 2 students.</a:t>
-            </a:r>
-            <a:endParaRPr lang="en-US" sz="1200" dirty="0"/>
-          </a:p>
-        </p:txBody>
-      </p:sp>
-      <p:sp>
-        <p:nvSpPr>
-          <p:cNvPr id="5" name="Text 3"/>
-          <p:cNvSpPr/>
-          <p:nvPr/>
-        </p:nvSpPr>
-        <p:spPr>
-          <a:xfrm>
-            <a:off x="634901" y="1173063"/>
-            <a:ext cx="8102798" cy="487561"/>
-          </a:xfrm>
-          <a:prstGeom prst="rect">
-            <a:avLst/>
-          </a:prstGeom>
-          <a:noFill/>
-          <a:ln/>
-        </p:spPr>
-        <p:txBody>
-          <a:bodyPr wrap="square" lIns="0" tIns="0" rIns="0" bIns="0" rtlCol="0" anchor="t"/>
-          <a:lstStyle/>
-          <a:p>
-            <a:pPr algn="l" marL="342900" indent="-342900">
-              <a:lnSpc>
-                <a:spcPts val="1620"/>
-              </a:lnSpc>
-              <a:spcAft>
-                <a:spcPts val="300"/>
-              </a:spcAft>
-              <a:buSzPct val="100000"/>
-              <a:buChar char="•"/>
-            </a:pPr>
-            <a:r>
-              <a:rPr lang="en-US" sz="1200" i="1" dirty="0">
-                <a:solidFill>
-                  <a:srgbClr val="1C2833"/>
-                </a:solidFill>
-                <a:latin typeface="Arial" pitchFamily="34" charset="0"/>
-                <a:ea typeface="Arial" pitchFamily="34" charset="-122"/>
-                <a:cs typeface="Arial" pitchFamily="34" charset="-120"/>
-              </a:rPr>
-              <a:t>"All week we've talked about the elements as if they sit nicely in their boxes. Today we'll see what happens when one of them takes over — or disappears."</a:t>
-            </a:r>
-            <a:endParaRPr lang="en-US" sz="1200" dirty="0"/>
-          </a:p>
-        </p:txBody>
-      </p:sp>
-      <p:sp>
-        <p:nvSpPr>
-          <p:cNvPr id="6" name="Text 4"/>
           <p:cNvSpPr/>
           <p:nvPr/>
         </p:nvSpPr>
@@ -4387,7 +5811,7 @@
                 <a:ea typeface="Georgia" pitchFamily="34" charset="-122"/>
                 <a:cs typeface="Georgia" pitchFamily="34" charset="-120"/>
               </a:rPr>
-              <a:t>Core (15 min) — From individual elements to imbalanced systems</a:t>
+              <a:t>Warm-up (5 min)</a:t>
             </a:r>
             <a:endParaRPr lang="en-US" sz="1800" dirty="0"/>
           </a:p>
@@ -4402,7 +5826,7 @@
         <p:spPr>
           <a:xfrm>
             <a:off x="634901" y="883593"/>
-            <a:ext cx="8102798" cy="281880"/>
+            <a:ext cx="8102798" cy="731341"/>
           </a:xfrm>
           <a:prstGeom prst="rect">
             <a:avLst/>
@@ -4425,26 +5849,6 @@
               <a:buChar char="•"/>
             </a:pPr>
             <a:r>
-              <a:rPr lang="en-US" sz="1200" b="1" dirty="0">
-                <a:solidFill>
-                  <a:srgbClr val="1C2833"/>
-                </a:solidFill>
-                <a:latin typeface="Arial" pitchFamily="34" charset="0"/>
-                <a:ea typeface="Arial" pitchFamily="34" charset="-122"/>
-                <a:cs typeface="Arial" pitchFamily="34" charset="-120"/>
-              </a:rPr>
-              <a:t>Open question, take 3 answers:</a:t>
-            </a:r>
-            <a:pPr algn="l" indent="0" marL="0">
-              <a:lnSpc>
-                <a:spcPts val="1620"/>
-              </a:lnSpc>
-              <a:spcAft>
-                <a:spcPts val="300"/>
-              </a:spcAft>
-              <a:buNone/>
-            </a:pPr>
-            <a:r>
               <a:rPr lang="en-US" sz="1200" dirty="0">
                 <a:solidFill>
                   <a:srgbClr val="1C2833"/>
@@ -4453,422 +5857,10 @@
                 <a:ea typeface="Arial" pitchFamily="34" charset="-122"/>
                 <a:cs typeface="Arial" pitchFamily="34" charset="-120"/>
               </a:rPr>
-              <a:t> </a:t>
-            </a:r>
-            <a:pPr algn="l" indent="0" marL="0">
-              <a:lnSpc>
-                <a:spcPts val="1620"/>
-              </a:lnSpc>
-              <a:spcAft>
-                <a:spcPts val="300"/>
-              </a:spcAft>
-              <a:buNone/>
-            </a:pPr>
-            <a:r>
-              <a:rPr lang="en-US" sz="1200" i="1" dirty="0">
-                <a:solidFill>
-                  <a:srgbClr val="1C2833"/>
-                </a:solidFill>
-                <a:latin typeface="Arial" pitchFamily="34" charset="0"/>
-                <a:ea typeface="Arial" pitchFamily="34" charset="-122"/>
-                <a:cs typeface="Arial" pitchFamily="34" charset="-120"/>
-              </a:rPr>
-              <a:t>"Can you think of a place where one of the five elements is too much, or too little?"</a:t>
+              <a:t>Daily prompt — 2 students.</a:t>
             </a:r>
             <a:endParaRPr lang="en-US" sz="1200" dirty="0"/>
           </a:p>
-        </p:txBody>
-      </p:sp>
-      <p:sp>
-        <p:nvSpPr>
-          <p:cNvPr id="5" name="Text 3"/>
-          <p:cNvSpPr/>
-          <p:nvPr/>
-        </p:nvSpPr>
-        <p:spPr>
-          <a:xfrm>
-            <a:off x="406301" y="1254323"/>
-            <a:ext cx="8498026" cy="426541"/>
-          </a:xfrm>
-          <a:prstGeom prst="rect">
-            <a:avLst/>
-          </a:prstGeom>
-          <a:noFill/>
-          <a:ln/>
-        </p:spPr>
-        <p:txBody>
-          <a:bodyPr wrap="square" lIns="0" tIns="0" rIns="0" bIns="0" rtlCol="0" anchor="t"/>
-          <a:lstStyle/>
-          <a:p>
-            <a:pPr algn="l" indent="0" marL="0">
-              <a:lnSpc>
-                <a:spcPts val="1680"/>
-              </a:lnSpc>
-              <a:spcBef>
-                <a:spcPts val="300"/>
-              </a:spcBef>
-              <a:spcAft>
-                <a:spcPts val="300"/>
-              </a:spcAft>
-              <a:buNone/>
-            </a:pPr>
-            <a:r>
-              <a:rPr lang="en-US" sz="1200" dirty="0">
-                <a:solidFill>
-                  <a:srgbClr val="1C2833"/>
-                </a:solidFill>
-                <a:latin typeface="Arial" pitchFamily="34" charset="0"/>
-                <a:ea typeface="Arial" pitchFamily="34" charset="-122"/>
-                <a:cs typeface="Arial" pitchFamily="34" charset="-120"/>
-              </a:rPr>
-              <a:t>– Example answers students typically give: too much smoke (</a:t>
-            </a:r>
-            <a:pPr algn="l" indent="0" marL="0">
-              <a:lnSpc>
-                <a:spcPts val="1680"/>
-              </a:lnSpc>
-              <a:spcBef>
-                <a:spcPts val="300"/>
-              </a:spcBef>
-              <a:spcAft>
-                <a:spcPts val="300"/>
-              </a:spcAft>
-              <a:buNone/>
-            </a:pPr>
-            <a:r>
-              <a:rPr lang="en-US" sz="1200" i="1" dirty="0">
-                <a:solidFill>
-                  <a:srgbClr val="1C2833"/>
-                </a:solidFill>
-                <a:latin typeface="Arial" pitchFamily="34" charset="0"/>
-                <a:ea typeface="Arial" pitchFamily="34" charset="-122"/>
-                <a:cs typeface="Arial" pitchFamily="34" charset="-120"/>
-              </a:rPr>
-              <a:t>tejas</a:t>
-            </a:r>
-            <a:pPr algn="l" indent="0" marL="0">
-              <a:lnSpc>
-                <a:spcPts val="1680"/>
-              </a:lnSpc>
-              <a:spcBef>
-                <a:spcPts val="300"/>
-              </a:spcBef>
-              <a:spcAft>
-                <a:spcPts val="300"/>
-              </a:spcAft>
-              <a:buNone/>
-            </a:pPr>
-            <a:r>
-              <a:rPr lang="en-US" sz="1200" dirty="0">
-                <a:solidFill>
-                  <a:srgbClr val="1C2833"/>
-                </a:solidFill>
-                <a:latin typeface="Arial" pitchFamily="34" charset="0"/>
-                <a:ea typeface="Arial" pitchFamily="34" charset="-122"/>
-                <a:cs typeface="Arial" pitchFamily="34" charset="-120"/>
-              </a:rPr>
-              <a:t> or </a:t>
-            </a:r>
-            <a:pPr algn="l" indent="0" marL="0">
-              <a:lnSpc>
-                <a:spcPts val="1680"/>
-              </a:lnSpc>
-              <a:spcBef>
-                <a:spcPts val="300"/>
-              </a:spcBef>
-              <a:spcAft>
-                <a:spcPts val="300"/>
-              </a:spcAft>
-              <a:buNone/>
-            </a:pPr>
-            <a:r>
-              <a:rPr lang="en-US" sz="1200" i="1" dirty="0">
-                <a:solidFill>
-                  <a:srgbClr val="1C2833"/>
-                </a:solidFill>
-                <a:latin typeface="Arial" pitchFamily="34" charset="0"/>
-                <a:ea typeface="Arial" pitchFamily="34" charset="-122"/>
-                <a:cs typeface="Arial" pitchFamily="34" charset="-120"/>
-              </a:rPr>
-              <a:t>vāyu</a:t>
-            </a:r>
-            <a:pPr algn="l" indent="0" marL="0">
-              <a:lnSpc>
-                <a:spcPts val="1680"/>
-              </a:lnSpc>
-              <a:spcBef>
-                <a:spcPts val="300"/>
-              </a:spcBef>
-              <a:spcAft>
-                <a:spcPts val="300"/>
-              </a:spcAft>
-              <a:buNone/>
-            </a:pPr>
-            <a:r>
-              <a:rPr lang="en-US" sz="1200" dirty="0">
-                <a:solidFill>
-                  <a:srgbClr val="1C2833"/>
-                </a:solidFill>
-                <a:latin typeface="Arial" pitchFamily="34" charset="0"/>
-                <a:ea typeface="Arial" pitchFamily="34" charset="-122"/>
-                <a:cs typeface="Arial" pitchFamily="34" charset="-120"/>
-              </a:rPr>
-              <a:t> — pollution), no water (</a:t>
-            </a:r>
-            <a:pPr algn="l" indent="0" marL="0">
-              <a:lnSpc>
-                <a:spcPts val="1680"/>
-              </a:lnSpc>
-              <a:spcBef>
-                <a:spcPts val="300"/>
-              </a:spcBef>
-              <a:spcAft>
-                <a:spcPts val="300"/>
-              </a:spcAft>
-              <a:buNone/>
-            </a:pPr>
-            <a:r>
-              <a:rPr lang="en-US" sz="1200" i="1" dirty="0">
-                <a:solidFill>
-                  <a:srgbClr val="1C2833"/>
-                </a:solidFill>
-                <a:latin typeface="Arial" pitchFamily="34" charset="0"/>
-                <a:ea typeface="Arial" pitchFamily="34" charset="-122"/>
-                <a:cs typeface="Arial" pitchFamily="34" charset="-120"/>
-              </a:rPr>
-              <a:t>ap</a:t>
-            </a:r>
-            <a:pPr algn="l" indent="0" marL="0">
-              <a:lnSpc>
-                <a:spcPts val="1680"/>
-              </a:lnSpc>
-              <a:spcBef>
-                <a:spcPts val="300"/>
-              </a:spcBef>
-              <a:spcAft>
-                <a:spcPts val="300"/>
-              </a:spcAft>
-              <a:buNone/>
-            </a:pPr>
-            <a:r>
-              <a:rPr lang="en-US" sz="1200" dirty="0">
-                <a:solidFill>
-                  <a:srgbClr val="1C2833"/>
-                </a:solidFill>
-                <a:latin typeface="Arial" pitchFamily="34" charset="0"/>
-                <a:ea typeface="Arial" pitchFamily="34" charset="-122"/>
-                <a:cs typeface="Arial" pitchFamily="34" charset="-120"/>
-              </a:rPr>
-              <a:t> — drought), too much plastic waste (</a:t>
-            </a:r>
-            <a:pPr algn="l" indent="0" marL="0">
-              <a:lnSpc>
-                <a:spcPts val="1680"/>
-              </a:lnSpc>
-              <a:spcBef>
-                <a:spcPts val="300"/>
-              </a:spcBef>
-              <a:spcAft>
-                <a:spcPts val="300"/>
-              </a:spcAft>
-              <a:buNone/>
-            </a:pPr>
-            <a:r>
-              <a:rPr lang="en-US" sz="1200" i="1" dirty="0">
-                <a:solidFill>
-                  <a:srgbClr val="1C2833"/>
-                </a:solidFill>
-                <a:latin typeface="Arial" pitchFamily="34" charset="0"/>
-                <a:ea typeface="Arial" pitchFamily="34" charset="-122"/>
-                <a:cs typeface="Arial" pitchFamily="34" charset="-120"/>
-              </a:rPr>
-              <a:t>pṛthvī</a:t>
-            </a:r>
-            <a:pPr algn="l" indent="0" marL="0">
-              <a:lnSpc>
-                <a:spcPts val="1680"/>
-              </a:lnSpc>
-              <a:spcBef>
-                <a:spcPts val="300"/>
-              </a:spcBef>
-              <a:spcAft>
-                <a:spcPts val="300"/>
-              </a:spcAft>
-              <a:buNone/>
-            </a:pPr>
-            <a:r>
-              <a:rPr lang="en-US" sz="1200" dirty="0">
-                <a:solidFill>
-                  <a:srgbClr val="1C2833"/>
-                </a:solidFill>
-                <a:latin typeface="Arial" pitchFamily="34" charset="0"/>
-                <a:ea typeface="Arial" pitchFamily="34" charset="-122"/>
-                <a:cs typeface="Arial" pitchFamily="34" charset="-120"/>
-              </a:rPr>
-              <a:t> — landfill), too noisy a road (</a:t>
-            </a:r>
-            <a:pPr algn="l" indent="0" marL="0">
-              <a:lnSpc>
-                <a:spcPts val="1680"/>
-              </a:lnSpc>
-              <a:spcBef>
-                <a:spcPts val="300"/>
-              </a:spcBef>
-              <a:spcAft>
-                <a:spcPts val="300"/>
-              </a:spcAft>
-              <a:buNone/>
-            </a:pPr>
-            <a:r>
-              <a:rPr lang="en-US" sz="1200" i="1" dirty="0">
-                <a:solidFill>
-                  <a:srgbClr val="1C2833"/>
-                </a:solidFill>
-                <a:latin typeface="Arial" pitchFamily="34" charset="0"/>
-                <a:ea typeface="Arial" pitchFamily="34" charset="-122"/>
-                <a:cs typeface="Arial" pitchFamily="34" charset="-120"/>
-              </a:rPr>
-              <a:t>ākāśa</a:t>
-            </a:r>
-            <a:pPr algn="l" indent="0" marL="0">
-              <a:lnSpc>
-                <a:spcPts val="1680"/>
-              </a:lnSpc>
-              <a:spcBef>
-                <a:spcPts val="300"/>
-              </a:spcBef>
-              <a:spcAft>
-                <a:spcPts val="300"/>
-              </a:spcAft>
-              <a:buNone/>
-            </a:pPr>
-            <a:r>
-              <a:rPr lang="en-US" sz="1200" dirty="0">
-                <a:solidFill>
-                  <a:srgbClr val="1C2833"/>
-                </a:solidFill>
-                <a:latin typeface="Arial" pitchFamily="34" charset="0"/>
-                <a:ea typeface="Arial" pitchFamily="34" charset="-122"/>
-                <a:cs typeface="Arial" pitchFamily="34" charset="-120"/>
-              </a:rPr>
-              <a:t> + </a:t>
-            </a:r>
-            <a:pPr algn="l" indent="0" marL="0">
-              <a:lnSpc>
-                <a:spcPts val="1680"/>
-              </a:lnSpc>
-              <a:spcBef>
-                <a:spcPts val="300"/>
-              </a:spcBef>
-              <a:spcAft>
-                <a:spcPts val="300"/>
-              </a:spcAft>
-              <a:buNone/>
-            </a:pPr>
-            <a:r>
-              <a:rPr lang="en-US" sz="1200" i="1" dirty="0">
-                <a:solidFill>
-                  <a:srgbClr val="1C2833"/>
-                </a:solidFill>
-                <a:latin typeface="Arial" pitchFamily="34" charset="0"/>
-                <a:ea typeface="Arial" pitchFamily="34" charset="-122"/>
-                <a:cs typeface="Arial" pitchFamily="34" charset="-120"/>
-              </a:rPr>
-              <a:t>śabda</a:t>
-            </a:r>
-            <a:pPr algn="l" indent="0" marL="0">
-              <a:lnSpc>
-                <a:spcPts val="1680"/>
-              </a:lnSpc>
-              <a:spcBef>
-                <a:spcPts val="300"/>
-              </a:spcBef>
-              <a:spcAft>
-                <a:spcPts val="300"/>
-              </a:spcAft>
-              <a:buNone/>
-            </a:pPr>
-            <a:r>
-              <a:rPr lang="en-US" sz="1200" dirty="0">
-                <a:solidFill>
-                  <a:srgbClr val="1C2833"/>
-                </a:solidFill>
-                <a:latin typeface="Arial" pitchFamily="34" charset="0"/>
-                <a:ea typeface="Arial" pitchFamily="34" charset="-122"/>
-                <a:cs typeface="Arial" pitchFamily="34" charset="-120"/>
-              </a:rPr>
-              <a:t> — sound pollution), too hot a city (</a:t>
-            </a:r>
-            <a:pPr algn="l" indent="0" marL="0">
-              <a:lnSpc>
-                <a:spcPts val="1680"/>
-              </a:lnSpc>
-              <a:spcBef>
-                <a:spcPts val="300"/>
-              </a:spcBef>
-              <a:spcAft>
-                <a:spcPts val="300"/>
-              </a:spcAft>
-              <a:buNone/>
-            </a:pPr>
-            <a:r>
-              <a:rPr lang="en-US" sz="1200" i="1" dirty="0">
-                <a:solidFill>
-                  <a:srgbClr val="1C2833"/>
-                </a:solidFill>
-                <a:latin typeface="Arial" pitchFamily="34" charset="0"/>
-                <a:ea typeface="Arial" pitchFamily="34" charset="-122"/>
-                <a:cs typeface="Arial" pitchFamily="34" charset="-120"/>
-              </a:rPr>
-              <a:t>tejas</a:t>
-            </a:r>
-            <a:pPr algn="l" indent="0" marL="0">
-              <a:lnSpc>
-                <a:spcPts val="1680"/>
-              </a:lnSpc>
-              <a:spcBef>
-                <a:spcPts val="300"/>
-              </a:spcBef>
-              <a:spcAft>
-                <a:spcPts val="300"/>
-              </a:spcAft>
-              <a:buNone/>
-            </a:pPr>
-            <a:r>
-              <a:rPr lang="en-US" sz="1200" dirty="0">
-                <a:solidFill>
-                  <a:srgbClr val="1C2833"/>
-                </a:solidFill>
-                <a:latin typeface="Arial" pitchFamily="34" charset="0"/>
-                <a:ea typeface="Arial" pitchFamily="34" charset="-122"/>
-                <a:cs typeface="Arial" pitchFamily="34" charset="-120"/>
-              </a:rPr>
-              <a:t> — heat island).</a:t>
-            </a:r>
-            <a:endParaRPr lang="en-US" sz="1200" dirty="0"/>
-          </a:p>
-        </p:txBody>
-      </p:sp>
-      <p:sp>
-        <p:nvSpPr>
-          <p:cNvPr id="6" name="Text 4"/>
-          <p:cNvSpPr/>
-          <p:nvPr/>
-        </p:nvSpPr>
-        <p:spPr>
-          <a:xfrm>
-            <a:off x="634901" y="1769715"/>
-            <a:ext cx="8102798" cy="281880"/>
-          </a:xfrm>
-          <a:prstGeom prst="rect">
-            <a:avLst/>
-          </a:prstGeom>
-          <a:noFill/>
-          <a:ln/>
-        </p:spPr>
-        <p:txBody>
-          <a:bodyPr wrap="square" lIns="0" tIns="0" rIns="0" bIns="0" rtlCol="0" anchor="t"/>
-          <a:lstStyle/>
           <a:p>
             <a:pPr algn="l" marL="342900" indent="-342900">
               <a:lnSpc>
@@ -4881,15 +5873,15 @@
               <a:buChar char="•"/>
             </a:pPr>
             <a:r>
-              <a:rPr lang="en-US" sz="1200" b="1" dirty="0">
-                <a:solidFill>
-                  <a:srgbClr val="1C2833"/>
-                </a:solidFill>
-                <a:latin typeface="Arial" pitchFamily="34" charset="0"/>
-                <a:ea typeface="Arial" pitchFamily="34" charset="-122"/>
-                <a:cs typeface="Arial" pitchFamily="34" charset="-120"/>
-              </a:rPr>
-              <a:t>Frame the principle (write on board):</a:t>
+              <a:rPr lang="en-US" sz="1200" i="1" dirty="0">
+                <a:solidFill>
+                  <a:srgbClr val="1C2833"/>
+                </a:solidFill>
+                <a:latin typeface="Arial" pitchFamily="34" charset="0"/>
+                <a:ea typeface="Arial" pitchFamily="34" charset="-122"/>
+                <a:cs typeface="Arial" pitchFamily="34" charset="-120"/>
+              </a:rPr>
+              <a:t>"All week we've talked about the elements as if they sit nicely in their boxes. Today we'll see what happens when one of them takes over — or disappears."</a:t>
             </a:r>
             <a:endParaRPr lang="en-US" sz="1200" dirty="0"/>
           </a:p>
@@ -4897,402 +5889,7 @@
       </p:sp>
       <p:sp>
         <p:nvSpPr>
-          <p:cNvPr id="7" name="Text 5"/>
-          <p:cNvSpPr/>
-          <p:nvPr/>
-        </p:nvSpPr>
-        <p:spPr>
-          <a:xfrm>
-            <a:off x="406301" y="2140446"/>
-            <a:ext cx="8498026" cy="213271"/>
-          </a:xfrm>
-          <a:prstGeom prst="rect">
-            <a:avLst/>
-          </a:prstGeom>
-          <a:noFill/>
-          <a:ln/>
-        </p:spPr>
-        <p:txBody>
-          <a:bodyPr wrap="square" lIns="0" tIns="0" rIns="0" bIns="0" rtlCol="0" anchor="t"/>
-          <a:lstStyle/>
-          <a:p>
-            <a:pPr algn="l" indent="0" marL="0">
-              <a:lnSpc>
-                <a:spcPts val="1680"/>
-              </a:lnSpc>
-              <a:spcBef>
-                <a:spcPts val="300"/>
-              </a:spcBef>
-              <a:spcAft>
-                <a:spcPts val="300"/>
-              </a:spcAft>
-              <a:buNone/>
-            </a:pPr>
-            <a:r>
-              <a:rPr lang="en-US" sz="1200" dirty="0">
-                <a:solidFill>
-                  <a:srgbClr val="1C2833"/>
-                </a:solidFill>
-                <a:latin typeface="Arial" pitchFamily="34" charset="0"/>
-                <a:ea typeface="Arial" pitchFamily="34" charset="-122"/>
-                <a:cs typeface="Arial" pitchFamily="34" charset="-120"/>
-              </a:rPr>
-              <a:t>&gt; </a:t>
-            </a:r>
-            <a:pPr algn="l" indent="0" marL="0">
-              <a:lnSpc>
-                <a:spcPts val="1680"/>
-              </a:lnSpc>
-              <a:spcBef>
-                <a:spcPts val="300"/>
-              </a:spcBef>
-              <a:spcAft>
-                <a:spcPts val="300"/>
-              </a:spcAft>
-              <a:buNone/>
-            </a:pPr>
-            <a:r>
-              <a:rPr lang="en-US" sz="1200" b="1" dirty="0">
-                <a:solidFill>
-                  <a:srgbClr val="1C2833"/>
-                </a:solidFill>
-                <a:latin typeface="Arial" pitchFamily="34" charset="0"/>
-                <a:ea typeface="Arial" pitchFamily="34" charset="-122"/>
-                <a:cs typeface="Arial" pitchFamily="34" charset="-120"/>
-              </a:rPr>
-              <a:t>A healthy environment has all five elements in balance. When one is overloaded or depleted, the others suffer.</a:t>
-            </a:r>
-            <a:endParaRPr lang="en-US" sz="1200" dirty="0"/>
-          </a:p>
-        </p:txBody>
-      </p:sp>
-      <p:sp>
-        <p:nvSpPr>
-          <p:cNvPr id="8" name="Text 6"/>
-          <p:cNvSpPr/>
-          <p:nvPr/>
-        </p:nvSpPr>
-        <p:spPr>
-          <a:xfrm>
-            <a:off x="634901" y="2442567"/>
-            <a:ext cx="8102798" cy="281880"/>
-          </a:xfrm>
-          <a:prstGeom prst="rect">
-            <a:avLst/>
-          </a:prstGeom>
-          <a:noFill/>
-          <a:ln/>
-        </p:spPr>
-        <p:txBody>
-          <a:bodyPr wrap="square" lIns="0" tIns="0" rIns="0" bIns="0" rtlCol="0" anchor="t"/>
-          <a:lstStyle/>
-          <a:p>
-            <a:pPr algn="l" marL="342900" indent="-342900">
-              <a:lnSpc>
-                <a:spcPts val="1620"/>
-              </a:lnSpc>
-              <a:spcAft>
-                <a:spcPts val="300"/>
-              </a:spcAft>
-              <a:buSzPct val="100000"/>
-              <a:buChar char="•"/>
-            </a:pPr>
-            <a:r>
-              <a:rPr lang="en-US" sz="1200" b="1" dirty="0">
-                <a:solidFill>
-                  <a:srgbClr val="1C2833"/>
-                </a:solidFill>
-                <a:latin typeface="Arial" pitchFamily="34" charset="0"/>
-                <a:ea typeface="Arial" pitchFamily="34" charset="-122"/>
-                <a:cs typeface="Arial" pitchFamily="34" charset="-120"/>
-              </a:rPr>
-              <a:t>Mini case study together — air pollution in Indian cities:</a:t>
-            </a:r>
-            <a:endParaRPr lang="en-US" sz="1200" dirty="0"/>
-          </a:p>
-        </p:txBody>
-      </p:sp>
-      <p:sp>
-        <p:nvSpPr>
-          <p:cNvPr id="9" name="Text 7"/>
-          <p:cNvSpPr/>
-          <p:nvPr/>
-        </p:nvSpPr>
-        <p:spPr>
-          <a:xfrm>
-            <a:off x="406301" y="2813298"/>
-            <a:ext cx="8498026" cy="639812"/>
-          </a:xfrm>
-          <a:prstGeom prst="rect">
-            <a:avLst/>
-          </a:prstGeom>
-          <a:noFill/>
-          <a:ln/>
-        </p:spPr>
-        <p:txBody>
-          <a:bodyPr wrap="square" lIns="0" tIns="0" rIns="0" bIns="0" rtlCol="0" anchor="t"/>
-          <a:lstStyle/>
-          <a:p>
-            <a:pPr algn="l" indent="0" marL="0">
-              <a:lnSpc>
-                <a:spcPts val="1680"/>
-              </a:lnSpc>
-              <a:spcBef>
-                <a:spcPts val="300"/>
-              </a:spcBef>
-              <a:spcAft>
-                <a:spcPts val="300"/>
-              </a:spcAft>
-              <a:buNone/>
-            </a:pPr>
-            <a:r>
-              <a:rPr lang="en-US" sz="1200" dirty="0">
-                <a:solidFill>
-                  <a:srgbClr val="1C2833"/>
-                </a:solidFill>
-                <a:latin typeface="Arial" pitchFamily="34" charset="0"/>
-                <a:ea typeface="Arial" pitchFamily="34" charset="-122"/>
-                <a:cs typeface="Arial" pitchFamily="34" charset="-120"/>
-              </a:rPr>
-              <a:t>– Too much </a:t>
-            </a:r>
-            <a:pPr algn="l" indent="0" marL="0">
-              <a:lnSpc>
-                <a:spcPts val="1680"/>
-              </a:lnSpc>
-              <a:spcBef>
-                <a:spcPts val="300"/>
-              </a:spcBef>
-              <a:spcAft>
-                <a:spcPts val="300"/>
-              </a:spcAft>
-              <a:buNone/>
-            </a:pPr>
-            <a:r>
-              <a:rPr lang="en-US" sz="1200" i="1" dirty="0">
-                <a:solidFill>
-                  <a:srgbClr val="1C2833"/>
-                </a:solidFill>
-                <a:latin typeface="Arial" pitchFamily="34" charset="0"/>
-                <a:ea typeface="Arial" pitchFamily="34" charset="-122"/>
-                <a:cs typeface="Arial" pitchFamily="34" charset="-120"/>
-              </a:rPr>
-              <a:t>tejas</a:t>
-            </a:r>
-            <a:pPr algn="l" indent="0" marL="0">
-              <a:lnSpc>
-                <a:spcPts val="1680"/>
-              </a:lnSpc>
-              <a:spcBef>
-                <a:spcPts val="300"/>
-              </a:spcBef>
-              <a:spcAft>
-                <a:spcPts val="300"/>
-              </a:spcAft>
-              <a:buNone/>
-            </a:pPr>
-            <a:r>
-              <a:rPr lang="en-US" sz="1200" dirty="0">
-                <a:solidFill>
-                  <a:srgbClr val="1C2833"/>
-                </a:solidFill>
-                <a:latin typeface="Arial" pitchFamily="34" charset="0"/>
-                <a:ea typeface="Arial" pitchFamily="34" charset="-122"/>
-                <a:cs typeface="Arial" pitchFamily="34" charset="-120"/>
-              </a:rPr>
-              <a:t> in the form of vehicle exhaust → </a:t>
-            </a:r>
-            <a:pPr algn="l" indent="0" marL="0">
-              <a:lnSpc>
-                <a:spcPts val="1680"/>
-              </a:lnSpc>
-              <a:spcBef>
-                <a:spcPts val="300"/>
-              </a:spcBef>
-              <a:spcAft>
-                <a:spcPts val="300"/>
-              </a:spcAft>
-              <a:buNone/>
-            </a:pPr>
-            <a:r>
-              <a:rPr lang="en-US" sz="1200" i="1" dirty="0">
-                <a:solidFill>
-                  <a:srgbClr val="1C2833"/>
-                </a:solidFill>
-                <a:latin typeface="Arial" pitchFamily="34" charset="0"/>
-                <a:ea typeface="Arial" pitchFamily="34" charset="-122"/>
-                <a:cs typeface="Arial" pitchFamily="34" charset="-120"/>
-              </a:rPr>
-              <a:t>vāyu</a:t>
-            </a:r>
-            <a:pPr algn="l" indent="0" marL="0">
-              <a:lnSpc>
-                <a:spcPts val="1680"/>
-              </a:lnSpc>
-              <a:spcBef>
-                <a:spcPts val="300"/>
-              </a:spcBef>
-              <a:spcAft>
-                <a:spcPts val="300"/>
-              </a:spcAft>
-              <a:buNone/>
-            </a:pPr>
-            <a:r>
-              <a:rPr lang="en-US" sz="1200" dirty="0">
-                <a:solidFill>
-                  <a:srgbClr val="1C2833"/>
-                </a:solidFill>
-                <a:latin typeface="Arial" pitchFamily="34" charset="0"/>
-                <a:ea typeface="Arial" pitchFamily="34" charset="-122"/>
-                <a:cs typeface="Arial" pitchFamily="34" charset="-120"/>
-              </a:rPr>
-              <a:t> becomes carrying polluted matter → </a:t>
-            </a:r>
-            <a:pPr algn="l" indent="0" marL="0">
-              <a:lnSpc>
-                <a:spcPts val="1680"/>
-              </a:lnSpc>
-              <a:spcBef>
-                <a:spcPts val="300"/>
-              </a:spcBef>
-              <a:spcAft>
-                <a:spcPts val="300"/>
-              </a:spcAft>
-              <a:buNone/>
-            </a:pPr>
-            <a:r>
-              <a:rPr lang="en-US" sz="1200" i="1" dirty="0">
-                <a:solidFill>
-                  <a:srgbClr val="1C2833"/>
-                </a:solidFill>
-                <a:latin typeface="Arial" pitchFamily="34" charset="0"/>
-                <a:ea typeface="Arial" pitchFamily="34" charset="-122"/>
-                <a:cs typeface="Arial" pitchFamily="34" charset="-120"/>
-              </a:rPr>
-              <a:t>ap</a:t>
-            </a:r>
-            <a:pPr algn="l" indent="0" marL="0">
-              <a:lnSpc>
-                <a:spcPts val="1680"/>
-              </a:lnSpc>
-              <a:spcBef>
-                <a:spcPts val="300"/>
-              </a:spcBef>
-              <a:spcAft>
-                <a:spcPts val="300"/>
-              </a:spcAft>
-              <a:buNone/>
-            </a:pPr>
-            <a:r>
-              <a:rPr lang="en-US" sz="1200" dirty="0">
-                <a:solidFill>
-                  <a:srgbClr val="1C2833"/>
-                </a:solidFill>
-                <a:latin typeface="Arial" pitchFamily="34" charset="0"/>
-                <a:ea typeface="Arial" pitchFamily="34" charset="-122"/>
-                <a:cs typeface="Arial" pitchFamily="34" charset="-120"/>
-              </a:rPr>
-              <a:t> (rain) becomes acidic → </a:t>
-            </a:r>
-            <a:pPr algn="l" indent="0" marL="0">
-              <a:lnSpc>
-                <a:spcPts val="1680"/>
-              </a:lnSpc>
-              <a:spcBef>
-                <a:spcPts val="300"/>
-              </a:spcBef>
-              <a:spcAft>
-                <a:spcPts val="300"/>
-              </a:spcAft>
-              <a:buNone/>
-            </a:pPr>
-            <a:r>
-              <a:rPr lang="en-US" sz="1200" i="1" dirty="0">
-                <a:solidFill>
-                  <a:srgbClr val="1C2833"/>
-                </a:solidFill>
-                <a:latin typeface="Arial" pitchFamily="34" charset="0"/>
-                <a:ea typeface="Arial" pitchFamily="34" charset="-122"/>
-                <a:cs typeface="Arial" pitchFamily="34" charset="-120"/>
-              </a:rPr>
-              <a:t>pṛthvī</a:t>
-            </a:r>
-            <a:pPr algn="l" indent="0" marL="0">
-              <a:lnSpc>
-                <a:spcPts val="1680"/>
-              </a:lnSpc>
-              <a:spcBef>
-                <a:spcPts val="300"/>
-              </a:spcBef>
-              <a:spcAft>
-                <a:spcPts val="300"/>
-              </a:spcAft>
-              <a:buNone/>
-            </a:pPr>
-            <a:r>
-              <a:rPr lang="en-US" sz="1200" dirty="0">
-                <a:solidFill>
-                  <a:srgbClr val="1C2833"/>
-                </a:solidFill>
-                <a:latin typeface="Arial" pitchFamily="34" charset="0"/>
-                <a:ea typeface="Arial" pitchFamily="34" charset="-122"/>
-                <a:cs typeface="Arial" pitchFamily="34" charset="-120"/>
-              </a:rPr>
-              <a:t> (soil) absorbs the acid → plants struggle → less oxygen → </a:t>
-            </a:r>
-            <a:pPr algn="l" indent="0" marL="0">
-              <a:lnSpc>
-                <a:spcPts val="1680"/>
-              </a:lnSpc>
-              <a:spcBef>
-                <a:spcPts val="300"/>
-              </a:spcBef>
-              <a:spcAft>
-                <a:spcPts val="300"/>
-              </a:spcAft>
-              <a:buNone/>
-            </a:pPr>
-            <a:r>
-              <a:rPr lang="en-US" sz="1200" i="1" dirty="0">
-                <a:solidFill>
-                  <a:srgbClr val="1C2833"/>
-                </a:solidFill>
-                <a:latin typeface="Arial" pitchFamily="34" charset="0"/>
-                <a:ea typeface="Arial" pitchFamily="34" charset="-122"/>
-                <a:cs typeface="Arial" pitchFamily="34" charset="-120"/>
-              </a:rPr>
-              <a:t>vāyu</a:t>
-            </a:r>
-            <a:pPr algn="l" indent="0" marL="0">
-              <a:lnSpc>
-                <a:spcPts val="1680"/>
-              </a:lnSpc>
-              <a:spcBef>
-                <a:spcPts val="300"/>
-              </a:spcBef>
-              <a:spcAft>
-                <a:spcPts val="300"/>
-              </a:spcAft>
-              <a:buNone/>
-            </a:pPr>
-            <a:r>
-              <a:rPr lang="en-US" sz="1200" dirty="0">
-                <a:solidFill>
-                  <a:srgbClr val="1C2833"/>
-                </a:solidFill>
-                <a:latin typeface="Arial" pitchFamily="34" charset="0"/>
-                <a:ea typeface="Arial" pitchFamily="34" charset="-122"/>
-                <a:cs typeface="Arial" pitchFamily="34" charset="-120"/>
-              </a:rPr>
-              <a:t> worsens further. – Notice: an imbalance in one element cascades.</a:t>
-            </a:r>
-            <a:endParaRPr lang="en-US" sz="1200" dirty="0"/>
-          </a:p>
-        </p:txBody>
-      </p:sp>
-      <p:sp>
-        <p:nvSpPr>
-          <p:cNvPr id="10" name="Text 8"/>
+          <p:cNvPr id="5" name="Text 3"/>
           <p:cNvSpPr/>
           <p:nvPr/>
         </p:nvSpPr>
@@ -5442,7 +6039,7 @@
                 <a:ea typeface="Georgia" pitchFamily="34" charset="-122"/>
                 <a:cs typeface="Georgia" pitchFamily="34" charset="-120"/>
               </a:rPr>
-              <a:t>Activity (20 min) — Five-Element Imbalance Map</a:t>
+              <a:t>Core (15 min) — From individual elements to imbalanced systems</a:t>
             </a:r>
             <a:endParaRPr lang="en-US" sz="1800" dirty="0"/>
           </a:p>
@@ -5456,8 +6053,8 @@
         </p:nvSpPr>
         <p:spPr>
           <a:xfrm>
-            <a:off x="406301" y="870942"/>
-            <a:ext cx="8498026" cy="213271"/>
+            <a:off x="634901" y="883593"/>
+            <a:ext cx="8102798" cy="281880"/>
           </a:xfrm>
           <a:prstGeom prst="rect">
             <a:avLst/>
@@ -5469,13 +6066,31 @@
           <a:bodyPr wrap="square" lIns="0" tIns="0" rIns="0" bIns="0" rtlCol="0" anchor="t"/>
           <a:lstStyle/>
           <a:p>
-            <a:pPr algn="l" indent="0" marL="0">
-              <a:lnSpc>
-                <a:spcPts val="1680"/>
-              </a:lnSpc>
-              <a:spcBef>
-                <a:spcPts val="300"/>
-              </a:spcBef>
+            <a:pPr algn="l" marL="342900" indent="-342900">
+              <a:lnSpc>
+                <a:spcPts val="1620"/>
+              </a:lnSpc>
+              <a:spcAft>
+                <a:spcPts val="300"/>
+              </a:spcAft>
+              <a:buSzPct val="100000"/>
+              <a:buChar char="•"/>
+            </a:pPr>
+            <a:r>
+              <a:rPr lang="en-US" sz="1200" b="1" dirty="0">
+                <a:solidFill>
+                  <a:srgbClr val="1C2833"/>
+                </a:solidFill>
+                <a:latin typeface="Arial" pitchFamily="34" charset="0"/>
+                <a:ea typeface="Arial" pitchFamily="34" charset="-122"/>
+                <a:cs typeface="Arial" pitchFamily="34" charset="-120"/>
+              </a:rPr>
+              <a:t>Open question, take 3 answers:</a:t>
+            </a:r>
+            <a:pPr algn="l" indent="0" marL="0">
+              <a:lnSpc>
+                <a:spcPts val="1620"/>
+              </a:lnSpc>
               <a:spcAft>
                 <a:spcPts val="300"/>
               </a:spcAft>
@@ -5490,7 +6105,27 @@
                 <a:ea typeface="Arial" pitchFamily="34" charset="-122"/>
                 <a:cs typeface="Arial" pitchFamily="34" charset="-120"/>
               </a:rPr>
-              <a:t>In groups of 4, each group tackles ONE element. On their large chart paper they fill four quadrants:</a:t>
+              <a:t> </a:t>
+            </a:r>
+            <a:pPr algn="l" indent="0" marL="0">
+              <a:lnSpc>
+                <a:spcPts val="1620"/>
+              </a:lnSpc>
+              <a:spcAft>
+                <a:spcPts val="300"/>
+              </a:spcAft>
+              <a:buNone/>
+            </a:pPr>
+            <a:r>
+              <a:rPr lang="en-US" sz="1200" i="1" dirty="0">
+                <a:solidFill>
+                  <a:srgbClr val="1C2833"/>
+                </a:solidFill>
+                <a:latin typeface="Arial" pitchFamily="34" charset="0"/>
+                <a:ea typeface="Arial" pitchFamily="34" charset="-122"/>
+                <a:cs typeface="Arial" pitchFamily="34" charset="-120"/>
+              </a:rPr>
+              <a:t>"Can you think of a place where one of the five elements is too much, or too little?"</a:t>
             </a:r>
             <a:endParaRPr lang="en-US" sz="1200" dirty="0"/>
           </a:p>
@@ -5504,8 +6139,8 @@
         </p:nvSpPr>
         <p:spPr>
           <a:xfrm>
-            <a:off x="634901" y="1173063"/>
-            <a:ext cx="8102798" cy="1013222"/>
+            <a:off x="634901" y="1266974"/>
+            <a:ext cx="8102798" cy="693241"/>
           </a:xfrm>
           <a:prstGeom prst="rect">
             <a:avLst/>
@@ -5528,15 +6163,15 @@
               <a:buChar char="•"/>
             </a:pPr>
             <a:r>
-              <a:rPr lang="en-US" sz="1200" b="1" dirty="0">
-                <a:solidFill>
-                  <a:srgbClr val="1C2833"/>
-                </a:solidFill>
-                <a:latin typeface="Arial" pitchFamily="34" charset="0"/>
-                <a:ea typeface="Arial" pitchFamily="34" charset="-122"/>
-                <a:cs typeface="Arial" pitchFamily="34" charset="-120"/>
-              </a:rPr>
-              <a:t>What this element does for us</a:t>
+              <a:rPr lang="en-US" sz="1200" dirty="0">
+                <a:solidFill>
+                  <a:srgbClr val="1C2833"/>
+                </a:solidFill>
+                <a:latin typeface="Arial" pitchFamily="34" charset="0"/>
+                <a:ea typeface="Arial" pitchFamily="34" charset="-122"/>
+                <a:cs typeface="Arial" pitchFamily="34" charset="-120"/>
+              </a:rPr>
+              <a:t>Example answers students typically give: too much smoke (</a:t>
             </a:r>
             <a:pPr algn="l" indent="0" marL="0">
               <a:lnSpc>
@@ -5548,6 +6183,26 @@
               <a:buNone/>
             </a:pPr>
             <a:r>
+              <a:rPr lang="en-US" sz="1200" i="1" dirty="0">
+                <a:solidFill>
+                  <a:srgbClr val="1C2833"/>
+                </a:solidFill>
+                <a:latin typeface="Arial" pitchFamily="34" charset="0"/>
+                <a:ea typeface="Arial" pitchFamily="34" charset="-122"/>
+                <a:cs typeface="Arial" pitchFamily="34" charset="-120"/>
+              </a:rPr>
+              <a:t>tejas</a:t>
+            </a:r>
+            <a:pPr algn="l" indent="0" marL="0">
+              <a:lnSpc>
+                <a:spcPts val="1620"/>
+              </a:lnSpc>
+              <a:spcAft>
+                <a:spcPts val="300"/>
+              </a:spcAft>
+              <a:buNone/>
+            </a:pPr>
+            <a:r>
               <a:rPr lang="en-US" sz="1200" dirty="0">
                 <a:solidFill>
                   <a:srgbClr val="1C2833"/>
@@ -5556,31 +6211,27 @@
                 <a:ea typeface="Arial" pitchFamily="34" charset="-122"/>
                 <a:cs typeface="Arial" pitchFamily="34" charset="-120"/>
               </a:rPr>
-              <a:t> (positive contributions)</a:t>
-            </a:r>
-            <a:endParaRPr lang="en-US" sz="1200" dirty="0"/>
-          </a:p>
-          <a:p>
-            <a:pPr algn="l" marL="342900" indent="-342900">
+              <a:t> or </a:t>
+            </a:r>
+            <a:pPr algn="l" indent="0" marL="0">
               <a:lnSpc>
                 <a:spcPts val="1620"/>
               </a:lnSpc>
               <a:spcAft>
                 <a:spcPts val="300"/>
               </a:spcAft>
-              <a:buSzPct val="100000"/>
-              <a:buChar char="•"/>
-            </a:pPr>
-            <a:r>
-              <a:rPr lang="en-US" sz="1200" b="1" dirty="0">
-                <a:solidFill>
-                  <a:srgbClr val="1C2833"/>
-                </a:solidFill>
-                <a:latin typeface="Arial" pitchFamily="34" charset="0"/>
-                <a:ea typeface="Arial" pitchFamily="34" charset="-122"/>
-                <a:cs typeface="Arial" pitchFamily="34" charset="-120"/>
-              </a:rPr>
-              <a:t>What an excess looks like in our area</a:t>
+              <a:buNone/>
+            </a:pPr>
+            <a:r>
+              <a:rPr lang="en-US" sz="1200" i="1" dirty="0">
+                <a:solidFill>
+                  <a:srgbClr val="1C2833"/>
+                </a:solidFill>
+                <a:latin typeface="Arial" pitchFamily="34" charset="0"/>
+                <a:ea typeface="Arial" pitchFamily="34" charset="-122"/>
+                <a:cs typeface="Arial" pitchFamily="34" charset="-120"/>
+              </a:rPr>
+              <a:t>vāyu</a:t>
             </a:r>
             <a:pPr algn="l" indent="0" marL="0">
               <a:lnSpc>
@@ -5600,31 +6251,27 @@
                 <a:ea typeface="Arial" pitchFamily="34" charset="-122"/>
                 <a:cs typeface="Arial" pitchFamily="34" charset="-120"/>
               </a:rPr>
-              <a:t> (one specific local example)</a:t>
-            </a:r>
-            <a:endParaRPr lang="en-US" sz="1200" dirty="0"/>
-          </a:p>
-          <a:p>
-            <a:pPr algn="l" marL="342900" indent="-342900">
+              <a:t> — pollution), no water (</a:t>
+            </a:r>
+            <a:pPr algn="l" indent="0" marL="0">
               <a:lnSpc>
                 <a:spcPts val="1620"/>
               </a:lnSpc>
               <a:spcAft>
                 <a:spcPts val="300"/>
               </a:spcAft>
-              <a:buSzPct val="100000"/>
-              <a:buChar char="•"/>
-            </a:pPr>
-            <a:r>
-              <a:rPr lang="en-US" sz="1200" b="1" dirty="0">
-                <a:solidFill>
-                  <a:srgbClr val="1C2833"/>
-                </a:solidFill>
-                <a:latin typeface="Arial" pitchFamily="34" charset="0"/>
-                <a:ea typeface="Arial" pitchFamily="34" charset="-122"/>
-                <a:cs typeface="Arial" pitchFamily="34" charset="-120"/>
-              </a:rPr>
-              <a:t>What a depletion looks like in our area</a:t>
+              <a:buNone/>
+            </a:pPr>
+            <a:r>
+              <a:rPr lang="en-US" sz="1200" i="1" dirty="0">
+                <a:solidFill>
+                  <a:srgbClr val="1C2833"/>
+                </a:solidFill>
+                <a:latin typeface="Arial" pitchFamily="34" charset="0"/>
+                <a:ea typeface="Arial" pitchFamily="34" charset="-122"/>
+                <a:cs typeface="Arial" pitchFamily="34" charset="-120"/>
+              </a:rPr>
+              <a:t>ap</a:t>
             </a:r>
             <a:pPr algn="l" indent="0" marL="0">
               <a:lnSpc>
@@ -5644,31 +6291,27 @@
                 <a:ea typeface="Arial" pitchFamily="34" charset="-122"/>
                 <a:cs typeface="Arial" pitchFamily="34" charset="-120"/>
               </a:rPr>
-              <a:t> (one specific local example)</a:t>
-            </a:r>
-            <a:endParaRPr lang="en-US" sz="1200" dirty="0"/>
-          </a:p>
-          <a:p>
-            <a:pPr algn="l" marL="342900" indent="-342900">
+              <a:t> — drought), too much plastic waste (</a:t>
+            </a:r>
+            <a:pPr algn="l" indent="0" marL="0">
               <a:lnSpc>
                 <a:spcPts val="1620"/>
               </a:lnSpc>
               <a:spcAft>
                 <a:spcPts val="300"/>
               </a:spcAft>
-              <a:buSzPct val="100000"/>
-              <a:buChar char="•"/>
-            </a:pPr>
-            <a:r>
-              <a:rPr lang="en-US" sz="1200" b="1" dirty="0">
-                <a:solidFill>
-                  <a:srgbClr val="1C2833"/>
-                </a:solidFill>
-                <a:latin typeface="Arial" pitchFamily="34" charset="0"/>
-                <a:ea typeface="Arial" pitchFamily="34" charset="-122"/>
-                <a:cs typeface="Arial" pitchFamily="34" charset="-120"/>
-              </a:rPr>
-              <a:t>One small thing students our age can actually do</a:t>
+              <a:buNone/>
+            </a:pPr>
+            <a:r>
+              <a:rPr lang="en-US" sz="1200" i="1" dirty="0">
+                <a:solidFill>
+                  <a:srgbClr val="1C2833"/>
+                </a:solidFill>
+                <a:latin typeface="Arial" pitchFamily="34" charset="0"/>
+                <a:ea typeface="Arial" pitchFamily="34" charset="-122"/>
+                <a:cs typeface="Arial" pitchFamily="34" charset="-120"/>
+              </a:rPr>
+              <a:t>pṛthvī</a:t>
             </a:r>
             <a:pPr algn="l" indent="0" marL="0">
               <a:lnSpc>
@@ -5688,7 +6331,127 @@
                 <a:ea typeface="Arial" pitchFamily="34" charset="-122"/>
                 <a:cs typeface="Arial" pitchFamily="34" charset="-120"/>
               </a:rPr>
-              <a:t> (concrete, doable this week)</a:t>
+              <a:t> — landfill), too noisy a road (</a:t>
+            </a:r>
+            <a:pPr algn="l" indent="0" marL="0">
+              <a:lnSpc>
+                <a:spcPts val="1620"/>
+              </a:lnSpc>
+              <a:spcAft>
+                <a:spcPts val="300"/>
+              </a:spcAft>
+              <a:buNone/>
+            </a:pPr>
+            <a:r>
+              <a:rPr lang="en-US" sz="1200" i="1" dirty="0">
+                <a:solidFill>
+                  <a:srgbClr val="1C2833"/>
+                </a:solidFill>
+                <a:latin typeface="Arial" pitchFamily="34" charset="0"/>
+                <a:ea typeface="Arial" pitchFamily="34" charset="-122"/>
+                <a:cs typeface="Arial" pitchFamily="34" charset="-120"/>
+              </a:rPr>
+              <a:t>ākāśa</a:t>
+            </a:r>
+            <a:pPr algn="l" indent="0" marL="0">
+              <a:lnSpc>
+                <a:spcPts val="1620"/>
+              </a:lnSpc>
+              <a:spcAft>
+                <a:spcPts val="300"/>
+              </a:spcAft>
+              <a:buNone/>
+            </a:pPr>
+            <a:r>
+              <a:rPr lang="en-US" sz="1200" dirty="0">
+                <a:solidFill>
+                  <a:srgbClr val="1C2833"/>
+                </a:solidFill>
+                <a:latin typeface="Arial" pitchFamily="34" charset="0"/>
+                <a:ea typeface="Arial" pitchFamily="34" charset="-122"/>
+                <a:cs typeface="Arial" pitchFamily="34" charset="-120"/>
+              </a:rPr>
+              <a:t> + </a:t>
+            </a:r>
+            <a:pPr algn="l" indent="0" marL="0">
+              <a:lnSpc>
+                <a:spcPts val="1620"/>
+              </a:lnSpc>
+              <a:spcAft>
+                <a:spcPts val="300"/>
+              </a:spcAft>
+              <a:buNone/>
+            </a:pPr>
+            <a:r>
+              <a:rPr lang="en-US" sz="1200" i="1" dirty="0">
+                <a:solidFill>
+                  <a:srgbClr val="1C2833"/>
+                </a:solidFill>
+                <a:latin typeface="Arial" pitchFamily="34" charset="0"/>
+                <a:ea typeface="Arial" pitchFamily="34" charset="-122"/>
+                <a:cs typeface="Arial" pitchFamily="34" charset="-120"/>
+              </a:rPr>
+              <a:t>śabda</a:t>
+            </a:r>
+            <a:pPr algn="l" indent="0" marL="0">
+              <a:lnSpc>
+                <a:spcPts val="1620"/>
+              </a:lnSpc>
+              <a:spcAft>
+                <a:spcPts val="300"/>
+              </a:spcAft>
+              <a:buNone/>
+            </a:pPr>
+            <a:r>
+              <a:rPr lang="en-US" sz="1200" dirty="0">
+                <a:solidFill>
+                  <a:srgbClr val="1C2833"/>
+                </a:solidFill>
+                <a:latin typeface="Arial" pitchFamily="34" charset="0"/>
+                <a:ea typeface="Arial" pitchFamily="34" charset="-122"/>
+                <a:cs typeface="Arial" pitchFamily="34" charset="-120"/>
+              </a:rPr>
+              <a:t> — sound pollution), too hot a city (</a:t>
+            </a:r>
+            <a:pPr algn="l" indent="0" marL="0">
+              <a:lnSpc>
+                <a:spcPts val="1620"/>
+              </a:lnSpc>
+              <a:spcAft>
+                <a:spcPts val="300"/>
+              </a:spcAft>
+              <a:buNone/>
+            </a:pPr>
+            <a:r>
+              <a:rPr lang="en-US" sz="1200" i="1" dirty="0">
+                <a:solidFill>
+                  <a:srgbClr val="1C2833"/>
+                </a:solidFill>
+                <a:latin typeface="Arial" pitchFamily="34" charset="0"/>
+                <a:ea typeface="Arial" pitchFamily="34" charset="-122"/>
+                <a:cs typeface="Arial" pitchFamily="34" charset="-120"/>
+              </a:rPr>
+              <a:t>tejas</a:t>
+            </a:r>
+            <a:pPr algn="l" indent="0" marL="0">
+              <a:lnSpc>
+                <a:spcPts val="1620"/>
+              </a:lnSpc>
+              <a:spcAft>
+                <a:spcPts val="300"/>
+              </a:spcAft>
+              <a:buNone/>
+            </a:pPr>
+            <a:r>
+              <a:rPr lang="en-US" sz="1200" dirty="0">
+                <a:solidFill>
+                  <a:srgbClr val="1C2833"/>
+                </a:solidFill>
+                <a:latin typeface="Arial" pitchFamily="34" charset="0"/>
+                <a:ea typeface="Arial" pitchFamily="34" charset="-122"/>
+                <a:cs typeface="Arial" pitchFamily="34" charset="-120"/>
+              </a:rPr>
+              <a:t> — heat island).</a:t>
             </a:r>
             <a:endParaRPr lang="en-US" sz="1200" dirty="0"/>
           </a:p>
@@ -5702,8 +6465,8 @@
         </p:nvSpPr>
         <p:spPr>
           <a:xfrm>
-            <a:off x="406301" y="2275136"/>
-            <a:ext cx="8498026" cy="426541"/>
+            <a:off x="634901" y="2061716"/>
+            <a:ext cx="8102798" cy="281880"/>
           </a:xfrm>
           <a:prstGeom prst="rect">
             <a:avLst/>
@@ -5715,28 +6478,26 @@
           <a:bodyPr wrap="square" lIns="0" tIns="0" rIns="0" bIns="0" rtlCol="0" anchor="t"/>
           <a:lstStyle/>
           <a:p>
-            <a:pPr algn="l" indent="0" marL="0">
-              <a:lnSpc>
-                <a:spcPts val="1680"/>
-              </a:lnSpc>
-              <a:spcBef>
-                <a:spcPts val="300"/>
-              </a:spcBef>
-              <a:spcAft>
-                <a:spcPts val="300"/>
-              </a:spcAft>
-              <a:buNone/>
-            </a:pPr>
-            <a:r>
-              <a:rPr lang="en-US" sz="1200" dirty="0">
-                <a:solidFill>
-                  <a:srgbClr val="1C2833"/>
-                </a:solidFill>
-                <a:latin typeface="Arial" pitchFamily="34" charset="0"/>
-                <a:ea typeface="Arial" pitchFamily="34" charset="-122"/>
-                <a:cs typeface="Arial" pitchFamily="34" charset="-120"/>
-              </a:rPr>
-              <a:t>Each group sticks their chart on the wall. Gallery walk: students rotate, read all five charts, and place a sticky note on the action they'd most commit to.</a:t>
+            <a:pPr algn="l" marL="342900" indent="-342900">
+              <a:lnSpc>
+                <a:spcPts val="1620"/>
+              </a:lnSpc>
+              <a:spcAft>
+                <a:spcPts val="300"/>
+              </a:spcAft>
+              <a:buSzPct val="100000"/>
+              <a:buChar char="•"/>
+            </a:pPr>
+            <a:r>
+              <a:rPr lang="en-US" sz="1200" b="1" dirty="0">
+                <a:solidFill>
+                  <a:srgbClr val="1C2833"/>
+                </a:solidFill>
+                <a:latin typeface="Arial" pitchFamily="34" charset="0"/>
+                <a:ea typeface="Arial" pitchFamily="34" charset="-122"/>
+                <a:cs typeface="Arial" pitchFamily="34" charset="-120"/>
+              </a:rPr>
+              <a:t>Frame the principle (write on board):</a:t>
             </a:r>
             <a:endParaRPr lang="en-US" sz="1200" dirty="0"/>
           </a:p>
@@ -5861,7 +6622,7 @@
         <p:spPr>
           <a:xfrm>
             <a:off x="406301" y="457051"/>
-            <a:ext cx="8498026" cy="274290"/>
+            <a:ext cx="8498026" cy="548580"/>
           </a:xfrm>
           <a:prstGeom prst="rect">
             <a:avLst/>
@@ -5894,7 +6655,7 @@
                 <a:ea typeface="Georgia" pitchFamily="34" charset="-122"/>
                 <a:cs typeface="Georgia" pitchFamily="34" charset="-120"/>
               </a:rPr>
-              <a:t>Wrap-up (5 min)</a:t>
+              <a:t>Core (15 min) — From individual elements to imbalanced systems (cont.)</a:t>
             </a:r>
             <a:endParaRPr lang="en-US" sz="1800" dirty="0"/>
           </a:p>
@@ -5908,8 +6669,61 @@
         </p:nvSpPr>
         <p:spPr>
           <a:xfrm>
-            <a:off x="406301" y="870942"/>
-            <a:ext cx="8498026" cy="639812"/>
+            <a:off x="406301" y="1157883"/>
+            <a:ext cx="8331398" cy="842963"/>
+          </a:xfrm>
+          <a:prstGeom prst="rect">
+            <a:avLst/>
+          </a:prstGeom>
+          <a:solidFill>
+            <a:srgbClr val="F4F8F9"/>
+          </a:solidFill>
+          <a:ln/>
+        </p:spPr>
+        <p:txBody>
+          <a:bodyPr wrap="square" rtlCol="0" anchor="ctr"/>
+          <a:lstStyle/>
+          <a:p>
+            <a:pPr indent="0" marL="0">
+              <a:buNone/>
+            </a:pPr>
+            <a:endParaRPr lang="en-US" dirty="0"/>
+          </a:p>
+        </p:txBody>
+      </p:sp>
+      <p:sp>
+        <p:nvSpPr>
+          <p:cNvPr id="5" name="Shape 3"/>
+          <p:cNvSpPr/>
+          <p:nvPr/>
+        </p:nvSpPr>
+        <p:spPr>
+          <a:xfrm>
+            <a:off x="434876" y="1157883"/>
+            <a:ext cx="0" cy="842963"/>
+          </a:xfrm>
+          <a:prstGeom prst="line">
+            <a:avLst/>
+          </a:prstGeom>
+          <a:noFill/>
+          <a:ln w="57150">
+            <a:solidFill>
+              <a:srgbClr val="FE4447"/>
+            </a:solidFill>
+            <a:prstDash val="solid"/>
+          </a:ln>
+        </p:spPr>
+      </p:sp>
+      <p:sp>
+        <p:nvSpPr>
+          <p:cNvPr id="6" name="Text 4"/>
+          <p:cNvSpPr/>
+          <p:nvPr/>
+        </p:nvSpPr>
+        <p:spPr>
+          <a:xfrm>
+            <a:off x="692051" y="1348383"/>
+            <a:ext cx="7973389" cy="461963"/>
           </a:xfrm>
           <a:prstGeom prst="rect">
             <a:avLst/>
@@ -5923,7 +6737,7 @@
           <a:p>
             <a:pPr algn="l" indent="0" marL="0">
               <a:lnSpc>
-                <a:spcPts val="1680"/>
+                <a:spcPts val="1820"/>
               </a:lnSpc>
               <a:spcBef>
                 <a:spcPts val="300"/>
@@ -5934,6 +6748,98 @@
               <a:buNone/>
             </a:pPr>
             <a:r>
+              <a:rPr lang="en-US" sz="1300" b="1" i="1" dirty="0">
+                <a:solidFill>
+                  <a:srgbClr val="1C2833"/>
+                </a:solidFill>
+                <a:latin typeface="Georgia" pitchFamily="34" charset="0"/>
+                <a:ea typeface="Georgia" pitchFamily="34" charset="-122"/>
+                <a:cs typeface="Georgia" pitchFamily="34" charset="-120"/>
+              </a:rPr>
+              <a:t>A healthy environment has all five elements in balance. When one is overloaded or depleted, the others suffer.</a:t>
+            </a:r>
+            <a:endParaRPr lang="en-US" sz="1300" dirty="0"/>
+          </a:p>
+        </p:txBody>
+      </p:sp>
+      <p:sp>
+        <p:nvSpPr>
+          <p:cNvPr id="7" name="Text 5"/>
+          <p:cNvSpPr/>
+          <p:nvPr/>
+        </p:nvSpPr>
+        <p:spPr>
+          <a:xfrm>
+            <a:off x="634901" y="2102346"/>
+            <a:ext cx="8102798" cy="281880"/>
+          </a:xfrm>
+          <a:prstGeom prst="rect">
+            <a:avLst/>
+          </a:prstGeom>
+          <a:noFill/>
+          <a:ln/>
+        </p:spPr>
+        <p:txBody>
+          <a:bodyPr wrap="square" lIns="0" tIns="0" rIns="0" bIns="0" rtlCol="0" anchor="t"/>
+          <a:lstStyle/>
+          <a:p>
+            <a:pPr algn="l" marL="342900" indent="-342900">
+              <a:lnSpc>
+                <a:spcPts val="1620"/>
+              </a:lnSpc>
+              <a:spcAft>
+                <a:spcPts val="300"/>
+              </a:spcAft>
+              <a:buSzPct val="100000"/>
+              <a:buChar char="•"/>
+            </a:pPr>
+            <a:r>
+              <a:rPr lang="en-US" sz="1200" b="1" dirty="0">
+                <a:solidFill>
+                  <a:srgbClr val="1C2833"/>
+                </a:solidFill>
+                <a:latin typeface="Arial" pitchFamily="34" charset="0"/>
+                <a:ea typeface="Arial" pitchFamily="34" charset="-122"/>
+                <a:cs typeface="Arial" pitchFamily="34" charset="-120"/>
+              </a:rPr>
+              <a:t>Mini case study together — air pollution in Indian cities:</a:t>
+            </a:r>
+            <a:endParaRPr lang="en-US" sz="1200" dirty="0"/>
+          </a:p>
+        </p:txBody>
+      </p:sp>
+      <p:sp>
+        <p:nvSpPr>
+          <p:cNvPr id="8" name="Text 6"/>
+          <p:cNvSpPr/>
+          <p:nvPr/>
+        </p:nvSpPr>
+        <p:spPr>
+          <a:xfrm>
+            <a:off x="634901" y="2485727"/>
+            <a:ext cx="8102798" cy="731341"/>
+          </a:xfrm>
+          <a:prstGeom prst="rect">
+            <a:avLst/>
+          </a:prstGeom>
+          <a:noFill/>
+          <a:ln/>
+        </p:spPr>
+        <p:txBody>
+          <a:bodyPr wrap="square" lIns="0" tIns="0" rIns="0" bIns="0" rtlCol="0" anchor="t"/>
+          <a:lstStyle/>
+          <a:p>
+            <a:pPr algn="l" marL="342900" indent="-342900">
+              <a:lnSpc>
+                <a:spcPts val="1620"/>
+              </a:lnSpc>
+              <a:spcAft>
+                <a:spcPts val="300"/>
+              </a:spcAft>
+              <a:buSzPct val="100000"/>
+              <a:buChar char="•"/>
+            </a:pPr>
+            <a:r>
               <a:rPr lang="en-US" sz="1200" dirty="0">
                 <a:solidFill>
                   <a:srgbClr val="1C2833"/>
@@ -5942,15 +6848,12 @@
                 <a:ea typeface="Arial" pitchFamily="34" charset="-122"/>
                 <a:cs typeface="Arial" pitchFamily="34" charset="-120"/>
               </a:rPr>
-              <a:t>– Each group reads aloud their chosen action (just the one line). – Note: </a:t>
-            </a:r>
-            <a:pPr algn="l" indent="0" marL="0">
-              <a:lnSpc>
-                <a:spcPts val="1680"/>
-              </a:lnSpc>
-              <a:spcBef>
-                <a:spcPts val="300"/>
-              </a:spcBef>
+              <a:t>Too much </a:t>
+            </a:r>
+            <a:pPr algn="l" indent="0" marL="0">
+              <a:lnSpc>
+                <a:spcPts val="1620"/>
+              </a:lnSpc>
               <a:spcAft>
                 <a:spcPts val="300"/>
               </a:spcAft>
@@ -5965,15 +6868,12 @@
                 <a:ea typeface="Arial" pitchFamily="34" charset="-122"/>
                 <a:cs typeface="Arial" pitchFamily="34" charset="-120"/>
               </a:rPr>
-              <a:t>"Notice how no single action solves everything — but every chart has at least one thing that's doable."</a:t>
-            </a:r>
-            <a:pPr algn="l" indent="0" marL="0">
-              <a:lnSpc>
-                <a:spcPts val="1680"/>
-              </a:lnSpc>
-              <a:spcBef>
-                <a:spcPts val="300"/>
-              </a:spcBef>
+              <a:t>tejas</a:t>
+            </a:r>
+            <a:pPr algn="l" indent="0" marL="0">
+              <a:lnSpc>
+                <a:spcPts val="1620"/>
+              </a:lnSpc>
               <a:spcAft>
                 <a:spcPts val="300"/>
               </a:spcAft>
@@ -5988,15 +6888,199 @@
                 <a:ea typeface="Arial" pitchFamily="34" charset="-122"/>
                 <a:cs typeface="Arial" pitchFamily="34" charset="-120"/>
               </a:rPr>
-              <a:t> – Preview Day 8: project work begins. Bring all your materials tomorrow.</a:t>
+              <a:t> in the form of vehicle exhaust → </a:t>
+            </a:r>
+            <a:pPr algn="l" indent="0" marL="0">
+              <a:lnSpc>
+                <a:spcPts val="1620"/>
+              </a:lnSpc>
+              <a:spcAft>
+                <a:spcPts val="300"/>
+              </a:spcAft>
+              <a:buNone/>
+            </a:pPr>
+            <a:r>
+              <a:rPr lang="en-US" sz="1200" i="1" dirty="0">
+                <a:solidFill>
+                  <a:srgbClr val="1C2833"/>
+                </a:solidFill>
+                <a:latin typeface="Arial" pitchFamily="34" charset="0"/>
+                <a:ea typeface="Arial" pitchFamily="34" charset="-122"/>
+                <a:cs typeface="Arial" pitchFamily="34" charset="-120"/>
+              </a:rPr>
+              <a:t>vāyu</a:t>
+            </a:r>
+            <a:pPr algn="l" indent="0" marL="0">
+              <a:lnSpc>
+                <a:spcPts val="1620"/>
+              </a:lnSpc>
+              <a:spcAft>
+                <a:spcPts val="300"/>
+              </a:spcAft>
+              <a:buNone/>
+            </a:pPr>
+            <a:r>
+              <a:rPr lang="en-US" sz="1200" dirty="0">
+                <a:solidFill>
+                  <a:srgbClr val="1C2833"/>
+                </a:solidFill>
+                <a:latin typeface="Arial" pitchFamily="34" charset="0"/>
+                <a:ea typeface="Arial" pitchFamily="34" charset="-122"/>
+                <a:cs typeface="Arial" pitchFamily="34" charset="-120"/>
+              </a:rPr>
+              <a:t> becomes carrying polluted matter → </a:t>
+            </a:r>
+            <a:pPr algn="l" indent="0" marL="0">
+              <a:lnSpc>
+                <a:spcPts val="1620"/>
+              </a:lnSpc>
+              <a:spcAft>
+                <a:spcPts val="300"/>
+              </a:spcAft>
+              <a:buNone/>
+            </a:pPr>
+            <a:r>
+              <a:rPr lang="en-US" sz="1200" i="1" dirty="0">
+                <a:solidFill>
+                  <a:srgbClr val="1C2833"/>
+                </a:solidFill>
+                <a:latin typeface="Arial" pitchFamily="34" charset="0"/>
+                <a:ea typeface="Arial" pitchFamily="34" charset="-122"/>
+                <a:cs typeface="Arial" pitchFamily="34" charset="-120"/>
+              </a:rPr>
+              <a:t>ap</a:t>
+            </a:r>
+            <a:pPr algn="l" indent="0" marL="0">
+              <a:lnSpc>
+                <a:spcPts val="1620"/>
+              </a:lnSpc>
+              <a:spcAft>
+                <a:spcPts val="300"/>
+              </a:spcAft>
+              <a:buNone/>
+            </a:pPr>
+            <a:r>
+              <a:rPr lang="en-US" sz="1200" dirty="0">
+                <a:solidFill>
+                  <a:srgbClr val="1C2833"/>
+                </a:solidFill>
+                <a:latin typeface="Arial" pitchFamily="34" charset="0"/>
+                <a:ea typeface="Arial" pitchFamily="34" charset="-122"/>
+                <a:cs typeface="Arial" pitchFamily="34" charset="-120"/>
+              </a:rPr>
+              <a:t> (rain) becomes acidic → </a:t>
+            </a:r>
+            <a:pPr algn="l" indent="0" marL="0">
+              <a:lnSpc>
+                <a:spcPts val="1620"/>
+              </a:lnSpc>
+              <a:spcAft>
+                <a:spcPts val="300"/>
+              </a:spcAft>
+              <a:buNone/>
+            </a:pPr>
+            <a:r>
+              <a:rPr lang="en-US" sz="1200" i="1" dirty="0">
+                <a:solidFill>
+                  <a:srgbClr val="1C2833"/>
+                </a:solidFill>
+                <a:latin typeface="Arial" pitchFamily="34" charset="0"/>
+                <a:ea typeface="Arial" pitchFamily="34" charset="-122"/>
+                <a:cs typeface="Arial" pitchFamily="34" charset="-120"/>
+              </a:rPr>
+              <a:t>pṛthvī</a:t>
+            </a:r>
+            <a:pPr algn="l" indent="0" marL="0">
+              <a:lnSpc>
+                <a:spcPts val="1620"/>
+              </a:lnSpc>
+              <a:spcAft>
+                <a:spcPts val="300"/>
+              </a:spcAft>
+              <a:buNone/>
+            </a:pPr>
+            <a:r>
+              <a:rPr lang="en-US" sz="1200" dirty="0">
+                <a:solidFill>
+                  <a:srgbClr val="1C2833"/>
+                </a:solidFill>
+                <a:latin typeface="Arial" pitchFamily="34" charset="0"/>
+                <a:ea typeface="Arial" pitchFamily="34" charset="-122"/>
+                <a:cs typeface="Arial" pitchFamily="34" charset="-120"/>
+              </a:rPr>
+              <a:t> (soil) absorbs the acid → plants struggle → less oxygen → </a:t>
+            </a:r>
+            <a:pPr algn="l" indent="0" marL="0">
+              <a:lnSpc>
+                <a:spcPts val="1620"/>
+              </a:lnSpc>
+              <a:spcAft>
+                <a:spcPts val="300"/>
+              </a:spcAft>
+              <a:buNone/>
+            </a:pPr>
+            <a:r>
+              <a:rPr lang="en-US" sz="1200" i="1" dirty="0">
+                <a:solidFill>
+                  <a:srgbClr val="1C2833"/>
+                </a:solidFill>
+                <a:latin typeface="Arial" pitchFamily="34" charset="0"/>
+                <a:ea typeface="Arial" pitchFamily="34" charset="-122"/>
+                <a:cs typeface="Arial" pitchFamily="34" charset="-120"/>
+              </a:rPr>
+              <a:t>vāyu</a:t>
+            </a:r>
+            <a:pPr algn="l" indent="0" marL="0">
+              <a:lnSpc>
+                <a:spcPts val="1620"/>
+              </a:lnSpc>
+              <a:spcAft>
+                <a:spcPts val="300"/>
+              </a:spcAft>
+              <a:buNone/>
+            </a:pPr>
+            <a:r>
+              <a:rPr lang="en-US" sz="1200" dirty="0">
+                <a:solidFill>
+                  <a:srgbClr val="1C2833"/>
+                </a:solidFill>
+                <a:latin typeface="Arial" pitchFamily="34" charset="0"/>
+                <a:ea typeface="Arial" pitchFamily="34" charset="-122"/>
+                <a:cs typeface="Arial" pitchFamily="34" charset="-120"/>
+              </a:rPr>
+              <a:t> worsens further.</a:t>
             </a:r>
             <a:endParaRPr lang="en-US" sz="1200" dirty="0"/>
           </a:p>
-        </p:txBody>
-      </p:sp>
-      <p:sp>
-        <p:nvSpPr>
-          <p:cNvPr id="5" name="Text 3"/>
+          <a:p>
+            <a:pPr algn="l" marL="342900" indent="-342900">
+              <a:lnSpc>
+                <a:spcPts val="1620"/>
+              </a:lnSpc>
+              <a:spcAft>
+                <a:spcPts val="300"/>
+              </a:spcAft>
+              <a:buSzPct val="100000"/>
+              <a:buChar char="•"/>
+            </a:pPr>
+            <a:r>
+              <a:rPr lang="en-US" sz="1200" dirty="0">
+                <a:solidFill>
+                  <a:srgbClr val="1C2833"/>
+                </a:solidFill>
+                <a:latin typeface="Arial" pitchFamily="34" charset="0"/>
+                <a:ea typeface="Arial" pitchFamily="34" charset="-122"/>
+                <a:cs typeface="Arial" pitchFamily="34" charset="-120"/>
+              </a:rPr>
+              <a:t>Notice: an imbalance in one element cascades.</a:t>
+            </a:r>
+            <a:endParaRPr lang="en-US" sz="1200" dirty="0"/>
+          </a:p>
+        </p:txBody>
+      </p:sp>
+      <p:sp>
+        <p:nvSpPr>
+          <p:cNvPr id="9" name="Text 7"/>
           <p:cNvSpPr/>
           <p:nvPr/>
         </p:nvSpPr>
@@ -6146,7 +7230,7 @@
                 <a:ea typeface="Georgia" pitchFamily="34" charset="-122"/>
                 <a:cs typeface="Georgia" pitchFamily="34" charset="-120"/>
               </a:rPr>
-              <a:t>Student-facing content</a:t>
+              <a:t>Activity (20 min) — Five-Element Imbalance Map</a:t>
             </a:r>
             <a:endParaRPr lang="en-US" sz="1800" dirty="0"/>
           </a:p>
@@ -6160,61 +7244,56 @@
         </p:nvSpPr>
         <p:spPr>
           <a:xfrm>
-            <a:off x="406301" y="883593"/>
-            <a:ext cx="8331398" cy="3074194"/>
-          </a:xfrm>
-          <a:prstGeom prst="rect">
-            <a:avLst/>
-          </a:prstGeom>
-          <a:solidFill>
-            <a:srgbClr val="F4F8F9"/>
-          </a:solidFill>
+            <a:off x="406301" y="870942"/>
+            <a:ext cx="8498026" cy="213271"/>
+          </a:xfrm>
+          <a:prstGeom prst="rect">
+            <a:avLst/>
+          </a:prstGeom>
+          <a:noFill/>
           <a:ln/>
         </p:spPr>
         <p:txBody>
-          <a:bodyPr wrap="square" rtlCol="0" anchor="ctr"/>
-          <a:lstStyle/>
-          <a:p>
-            <a:pPr indent="0" marL="0">
-              <a:buNone/>
-            </a:pPr>
-            <a:endParaRPr lang="en-US" dirty="0"/>
-          </a:p>
-        </p:txBody>
-      </p:sp>
-      <p:sp>
-        <p:nvSpPr>
-          <p:cNvPr id="5" name="Shape 3"/>
+          <a:bodyPr wrap="square" lIns="0" tIns="0" rIns="0" bIns="0" rtlCol="0" anchor="t"/>
+          <a:lstStyle/>
+          <a:p>
+            <a:pPr algn="l" indent="0" marL="0">
+              <a:lnSpc>
+                <a:spcPts val="1680"/>
+              </a:lnSpc>
+              <a:spcBef>
+                <a:spcPts val="300"/>
+              </a:spcBef>
+              <a:spcAft>
+                <a:spcPts val="300"/>
+              </a:spcAft>
+              <a:buNone/>
+            </a:pPr>
+            <a:r>
+              <a:rPr lang="en-US" sz="1200" dirty="0">
+                <a:solidFill>
+                  <a:srgbClr val="1C2833"/>
+                </a:solidFill>
+                <a:latin typeface="Arial" pitchFamily="34" charset="0"/>
+                <a:ea typeface="Arial" pitchFamily="34" charset="-122"/>
+                <a:cs typeface="Arial" pitchFamily="34" charset="-120"/>
+              </a:rPr>
+              <a:t>In groups of 4, each group tackles ONE element. On their large chart paper they fill four quadrants:</a:t>
+            </a:r>
+            <a:endParaRPr lang="en-US" sz="1200" dirty="0"/>
+          </a:p>
+        </p:txBody>
+      </p:sp>
+      <p:sp>
+        <p:nvSpPr>
+          <p:cNvPr id="5" name="Text 3"/>
           <p:cNvSpPr/>
           <p:nvPr/>
         </p:nvSpPr>
         <p:spPr>
           <a:xfrm>
-            <a:off x="434876" y="883593"/>
-            <a:ext cx="0" cy="3074194"/>
-          </a:xfrm>
-          <a:prstGeom prst="line">
-            <a:avLst/>
-          </a:prstGeom>
-          <a:noFill/>
-          <a:ln w="57150">
-            <a:solidFill>
-              <a:srgbClr val="FE4447"/>
-            </a:solidFill>
-            <a:prstDash val="solid"/>
-          </a:ln>
-        </p:spPr>
-      </p:sp>
-      <p:sp>
-        <p:nvSpPr>
-          <p:cNvPr id="6" name="Text 4"/>
-          <p:cNvSpPr/>
-          <p:nvPr/>
-        </p:nvSpPr>
-        <p:spPr>
-          <a:xfrm>
-            <a:off x="692051" y="1074093"/>
-            <a:ext cx="7973389" cy="230981"/>
+            <a:off x="634901" y="1173063"/>
+            <a:ext cx="8102798" cy="1013222"/>
           </a:xfrm>
           <a:prstGeom prst="rect">
             <a:avLst/>
@@ -6226,504 +7305,186 @@
           <a:bodyPr wrap="square" lIns="0" tIns="0" rIns="0" bIns="0" rtlCol="0" anchor="t"/>
           <a:lstStyle/>
           <a:p>
-            <a:pPr algn="l" indent="0" marL="0">
-              <a:lnSpc>
-                <a:spcPts val="1820"/>
-              </a:lnSpc>
-              <a:spcBef>
-                <a:spcPts val="300"/>
-              </a:spcBef>
-              <a:spcAft>
-                <a:spcPts val="300"/>
-              </a:spcAft>
-              <a:buNone/>
-            </a:pPr>
-            <a:r>
-              <a:rPr lang="en-US" sz="1300" b="1" i="1" dirty="0">
-                <a:solidFill>
-                  <a:srgbClr val="1C2833"/>
-                </a:solidFill>
-                <a:latin typeface="Georgia" pitchFamily="34" charset="0"/>
-                <a:ea typeface="Georgia" pitchFamily="34" charset="-122"/>
-                <a:cs typeface="Georgia" pitchFamily="34" charset="-120"/>
-              </a:rPr>
-              <a:t>Balance and imbalance</a:t>
-            </a:r>
-            <a:endParaRPr lang="en-US" sz="1300" dirty="0"/>
-          </a:p>
-        </p:txBody>
-      </p:sp>
-      <p:sp>
-        <p:nvSpPr>
-          <p:cNvPr id="7" name="Text 5"/>
-          <p:cNvSpPr/>
-          <p:nvPr/>
-        </p:nvSpPr>
-        <p:spPr>
-          <a:xfrm>
-            <a:off x="692051" y="1343174"/>
-            <a:ext cx="7973389" cy="461963"/>
-          </a:xfrm>
-          <a:prstGeom prst="rect">
-            <a:avLst/>
-          </a:prstGeom>
-          <a:noFill/>
-          <a:ln/>
-        </p:spPr>
-        <p:txBody>
-          <a:bodyPr wrap="square" lIns="0" tIns="0" rIns="0" bIns="0" rtlCol="0" anchor="t"/>
-          <a:lstStyle/>
-          <a:p>
-            <a:pPr algn="l" indent="0" marL="0">
-              <a:lnSpc>
-                <a:spcPts val="1820"/>
-              </a:lnSpc>
-              <a:spcBef>
-                <a:spcPts val="300"/>
-              </a:spcBef>
-              <a:spcAft>
-                <a:spcPts val="300"/>
-              </a:spcAft>
-              <a:buNone/>
-            </a:pPr>
-            <a:r>
-              <a:rPr lang="en-US" sz="1300" i="1" dirty="0">
-                <a:solidFill>
-                  <a:srgbClr val="1C2833"/>
-                </a:solidFill>
-                <a:latin typeface="Georgia" pitchFamily="34" charset="0"/>
-                <a:ea typeface="Georgia" pitchFamily="34" charset="-122"/>
-                <a:cs typeface="Georgia" pitchFamily="34" charset="-120"/>
-              </a:rPr>
-              <a:t>A healthy environment has all five elements in balance. When one takes over or disappears, the others suffer.</a:t>
-            </a:r>
-            <a:endParaRPr lang="en-US" sz="1300" dirty="0"/>
-          </a:p>
-        </p:txBody>
-      </p:sp>
-      <p:sp>
-        <p:nvSpPr>
-          <p:cNvPr id="8" name="Text 6"/>
-          <p:cNvSpPr/>
-          <p:nvPr/>
-        </p:nvSpPr>
-        <p:spPr>
-          <a:xfrm>
-            <a:off x="692051" y="1843236"/>
-            <a:ext cx="7973389" cy="230981"/>
-          </a:xfrm>
-          <a:prstGeom prst="rect">
-            <a:avLst/>
-          </a:prstGeom>
-          <a:noFill/>
-          <a:ln/>
-        </p:spPr>
-        <p:txBody>
-          <a:bodyPr wrap="square" lIns="0" tIns="0" rIns="0" bIns="0" rtlCol="0" anchor="t"/>
-          <a:lstStyle/>
-          <a:p>
-            <a:pPr algn="l" indent="0" marL="0">
-              <a:lnSpc>
-                <a:spcPts val="1820"/>
-              </a:lnSpc>
-              <a:spcBef>
-                <a:spcPts val="300"/>
-              </a:spcBef>
-              <a:spcAft>
-                <a:spcPts val="300"/>
-              </a:spcAft>
-              <a:buNone/>
-            </a:pPr>
-            <a:r>
-              <a:rPr lang="en-US" sz="1300" i="1" dirty="0">
-                <a:solidFill>
-                  <a:srgbClr val="1C2833"/>
-                </a:solidFill>
-                <a:latin typeface="Georgia" pitchFamily="34" charset="0"/>
-                <a:ea typeface="Georgia" pitchFamily="34" charset="-122"/>
-                <a:cs typeface="Georgia" pitchFamily="34" charset="-120"/>
-              </a:rPr>
-              <a:t>Examples of imbalance you might recognise:</a:t>
-            </a:r>
-            <a:endParaRPr lang="en-US" sz="1300" dirty="0"/>
-          </a:p>
-        </p:txBody>
-      </p:sp>
-      <p:sp>
-        <p:nvSpPr>
-          <p:cNvPr id="9" name="Text 7"/>
-          <p:cNvSpPr/>
-          <p:nvPr/>
-        </p:nvSpPr>
-        <p:spPr>
-          <a:xfrm>
-            <a:off x="692051" y="2112318"/>
-            <a:ext cx="7973389" cy="1154906"/>
-          </a:xfrm>
-          <a:prstGeom prst="rect">
-            <a:avLst/>
-          </a:prstGeom>
-          <a:noFill/>
-          <a:ln/>
-        </p:spPr>
-        <p:txBody>
-          <a:bodyPr wrap="square" lIns="0" tIns="0" rIns="0" bIns="0" rtlCol="0" anchor="t"/>
-          <a:lstStyle/>
-          <a:p>
-            <a:pPr algn="l" indent="0" marL="0">
-              <a:lnSpc>
-                <a:spcPts val="1820"/>
-              </a:lnSpc>
-              <a:spcBef>
-                <a:spcPts val="300"/>
-              </a:spcBef>
-              <a:spcAft>
-                <a:spcPts val="300"/>
-              </a:spcAft>
-              <a:buNone/>
-            </a:pPr>
-            <a:r>
-              <a:rPr lang="en-US" sz="1300" dirty="0">
-                <a:solidFill>
-                  <a:srgbClr val="1C2833"/>
-                </a:solidFill>
-                <a:latin typeface="Georgia" pitchFamily="34" charset="0"/>
-                <a:ea typeface="Georgia" pitchFamily="34" charset="-122"/>
-                <a:cs typeface="Georgia" pitchFamily="34" charset="-120"/>
-              </a:rPr>
-              <a:t>| Imbalance | What you observe | |-----------|------------------| | Too much </a:t>
-            </a:r>
-            <a:pPr algn="l" indent="0" marL="0">
-              <a:lnSpc>
-                <a:spcPts val="1820"/>
-              </a:lnSpc>
-              <a:spcBef>
-                <a:spcPts val="300"/>
-              </a:spcBef>
-              <a:spcAft>
-                <a:spcPts val="300"/>
-              </a:spcAft>
-              <a:buNone/>
-            </a:pPr>
-            <a:r>
-              <a:rPr lang="en-US" sz="1300" i="1" dirty="0">
-                <a:solidFill>
-                  <a:srgbClr val="1C2833"/>
-                </a:solidFill>
-                <a:latin typeface="Georgia" pitchFamily="34" charset="0"/>
-                <a:ea typeface="Georgia" pitchFamily="34" charset="-122"/>
-                <a:cs typeface="Georgia" pitchFamily="34" charset="-120"/>
-              </a:rPr>
-              <a:t>tejas</a:t>
-            </a:r>
-            <a:pPr algn="l" indent="0" marL="0">
-              <a:lnSpc>
-                <a:spcPts val="1820"/>
-              </a:lnSpc>
-              <a:spcBef>
-                <a:spcPts val="300"/>
-              </a:spcBef>
-              <a:spcAft>
-                <a:spcPts val="300"/>
-              </a:spcAft>
-              <a:buNone/>
-            </a:pPr>
-            <a:r>
-              <a:rPr lang="en-US" sz="1300" dirty="0">
-                <a:solidFill>
-                  <a:srgbClr val="1C2833"/>
-                </a:solidFill>
-                <a:latin typeface="Georgia" pitchFamily="34" charset="0"/>
-                <a:ea typeface="Georgia" pitchFamily="34" charset="-122"/>
-                <a:cs typeface="Georgia" pitchFamily="34" charset="-120"/>
-              </a:rPr>
-              <a:t> (heat) | Urban heat-island; summer power cuts | | Too little </a:t>
-            </a:r>
-            <a:pPr algn="l" indent="0" marL="0">
-              <a:lnSpc>
-                <a:spcPts val="1820"/>
-              </a:lnSpc>
-              <a:spcBef>
-                <a:spcPts val="300"/>
-              </a:spcBef>
-              <a:spcAft>
-                <a:spcPts val="300"/>
-              </a:spcAft>
-              <a:buNone/>
-            </a:pPr>
-            <a:r>
-              <a:rPr lang="en-US" sz="1300" i="1" dirty="0">
-                <a:solidFill>
-                  <a:srgbClr val="1C2833"/>
-                </a:solidFill>
-                <a:latin typeface="Georgia" pitchFamily="34" charset="0"/>
-                <a:ea typeface="Georgia" pitchFamily="34" charset="-122"/>
-                <a:cs typeface="Georgia" pitchFamily="34" charset="-120"/>
-              </a:rPr>
-              <a:t>ap</a:t>
-            </a:r>
-            <a:pPr algn="l" indent="0" marL="0">
-              <a:lnSpc>
-                <a:spcPts val="1820"/>
-              </a:lnSpc>
-              <a:spcBef>
-                <a:spcPts val="300"/>
-              </a:spcBef>
-              <a:spcAft>
-                <a:spcPts val="300"/>
-              </a:spcAft>
-              <a:buNone/>
-            </a:pPr>
-            <a:r>
-              <a:rPr lang="en-US" sz="1300" dirty="0">
-                <a:solidFill>
-                  <a:srgbClr val="1C2833"/>
-                </a:solidFill>
-                <a:latin typeface="Georgia" pitchFamily="34" charset="0"/>
-                <a:ea typeface="Georgia" pitchFamily="34" charset="-122"/>
-                <a:cs typeface="Georgia" pitchFamily="34" charset="-120"/>
-              </a:rPr>
-              <a:t> (water) | Drought; failed crops; long water-queue at the tap | | Polluted </a:t>
-            </a:r>
-            <a:pPr algn="l" indent="0" marL="0">
-              <a:lnSpc>
-                <a:spcPts val="1820"/>
-              </a:lnSpc>
-              <a:spcBef>
-                <a:spcPts val="300"/>
-              </a:spcBef>
-              <a:spcAft>
-                <a:spcPts val="300"/>
-              </a:spcAft>
-              <a:buNone/>
-            </a:pPr>
-            <a:r>
-              <a:rPr lang="en-US" sz="1300" i="1" dirty="0">
-                <a:solidFill>
-                  <a:srgbClr val="1C2833"/>
-                </a:solidFill>
-                <a:latin typeface="Georgia" pitchFamily="34" charset="0"/>
-                <a:ea typeface="Georgia" pitchFamily="34" charset="-122"/>
-                <a:cs typeface="Georgia" pitchFamily="34" charset="-120"/>
-              </a:rPr>
-              <a:t>vāyu</a:t>
-            </a:r>
-            <a:pPr algn="l" indent="0" marL="0">
-              <a:lnSpc>
-                <a:spcPts val="1820"/>
-              </a:lnSpc>
-              <a:spcBef>
-                <a:spcPts val="300"/>
-              </a:spcBef>
-              <a:spcAft>
-                <a:spcPts val="300"/>
-              </a:spcAft>
-              <a:buNone/>
-            </a:pPr>
-            <a:r>
-              <a:rPr lang="en-US" sz="1300" dirty="0">
-                <a:solidFill>
-                  <a:srgbClr val="1C2833"/>
-                </a:solidFill>
-                <a:latin typeface="Georgia" pitchFamily="34" charset="0"/>
-                <a:ea typeface="Georgia" pitchFamily="34" charset="-122"/>
-                <a:cs typeface="Georgia" pitchFamily="34" charset="-120"/>
-              </a:rPr>
-              <a:t> (air) | Smog; difficulty breathing on bad-air days | | Polluted </a:t>
-            </a:r>
-            <a:pPr algn="l" indent="0" marL="0">
-              <a:lnSpc>
-                <a:spcPts val="1820"/>
-              </a:lnSpc>
-              <a:spcBef>
-                <a:spcPts val="300"/>
-              </a:spcBef>
-              <a:spcAft>
-                <a:spcPts val="300"/>
-              </a:spcAft>
-              <a:buNone/>
-            </a:pPr>
-            <a:r>
-              <a:rPr lang="en-US" sz="1300" i="1" dirty="0">
-                <a:solidFill>
-                  <a:srgbClr val="1C2833"/>
-                </a:solidFill>
-                <a:latin typeface="Georgia" pitchFamily="34" charset="0"/>
-                <a:ea typeface="Georgia" pitchFamily="34" charset="-122"/>
-                <a:cs typeface="Georgia" pitchFamily="34" charset="-120"/>
-              </a:rPr>
-              <a:t>pṛthvī</a:t>
-            </a:r>
-            <a:pPr algn="l" indent="0" marL="0">
-              <a:lnSpc>
-                <a:spcPts val="1820"/>
-              </a:lnSpc>
-              <a:spcBef>
-                <a:spcPts val="300"/>
-              </a:spcBef>
-              <a:spcAft>
-                <a:spcPts val="300"/>
-              </a:spcAft>
-              <a:buNone/>
-            </a:pPr>
-            <a:r>
-              <a:rPr lang="en-US" sz="1300" dirty="0">
-                <a:solidFill>
-                  <a:srgbClr val="1C2833"/>
-                </a:solidFill>
-                <a:latin typeface="Georgia" pitchFamily="34" charset="0"/>
-                <a:ea typeface="Georgia" pitchFamily="34" charset="-122"/>
-                <a:cs typeface="Georgia" pitchFamily="34" charset="-120"/>
-              </a:rPr>
-              <a:t> (earth) | Plastic waste; barren soil; landfill near homes | | Noisy </a:t>
-            </a:r>
-            <a:pPr algn="l" indent="0" marL="0">
-              <a:lnSpc>
-                <a:spcPts val="1820"/>
-              </a:lnSpc>
-              <a:spcBef>
-                <a:spcPts val="300"/>
-              </a:spcBef>
-              <a:spcAft>
-                <a:spcPts val="300"/>
-              </a:spcAft>
-              <a:buNone/>
-            </a:pPr>
-            <a:r>
-              <a:rPr lang="en-US" sz="1300" i="1" dirty="0">
-                <a:solidFill>
-                  <a:srgbClr val="1C2833"/>
-                </a:solidFill>
-                <a:latin typeface="Georgia" pitchFamily="34" charset="0"/>
-                <a:ea typeface="Georgia" pitchFamily="34" charset="-122"/>
-                <a:cs typeface="Georgia" pitchFamily="34" charset="-120"/>
-              </a:rPr>
-              <a:t>ākāśa</a:t>
-            </a:r>
-            <a:pPr algn="l" indent="0" marL="0">
-              <a:lnSpc>
-                <a:spcPts val="1820"/>
-              </a:lnSpc>
-              <a:spcBef>
-                <a:spcPts val="300"/>
-              </a:spcBef>
-              <a:spcAft>
-                <a:spcPts val="300"/>
-              </a:spcAft>
-              <a:buNone/>
-            </a:pPr>
-            <a:r>
-              <a:rPr lang="en-US" sz="1300" dirty="0">
-                <a:solidFill>
-                  <a:srgbClr val="1C2833"/>
-                </a:solidFill>
-                <a:latin typeface="Georgia" pitchFamily="34" charset="0"/>
-                <a:ea typeface="Georgia" pitchFamily="34" charset="-122"/>
-                <a:cs typeface="Georgia" pitchFamily="34" charset="-120"/>
-              </a:rPr>
-              <a:t> | Sound pollution; sleep disturbance; bad concentration |</a:t>
-            </a:r>
-            <a:endParaRPr lang="en-US" sz="1300" dirty="0"/>
-          </a:p>
-        </p:txBody>
-      </p:sp>
-      <p:sp>
-        <p:nvSpPr>
-          <p:cNvPr id="10" name="Text 8"/>
-          <p:cNvSpPr/>
-          <p:nvPr/>
-        </p:nvSpPr>
-        <p:spPr>
-          <a:xfrm>
-            <a:off x="692051" y="3305324"/>
-            <a:ext cx="7973389" cy="461963"/>
-          </a:xfrm>
-          <a:prstGeom prst="rect">
-            <a:avLst/>
-          </a:prstGeom>
-          <a:noFill/>
-          <a:ln/>
-        </p:spPr>
-        <p:txBody>
-          <a:bodyPr wrap="square" lIns="0" tIns="0" rIns="0" bIns="0" rtlCol="0" anchor="t"/>
-          <a:lstStyle/>
-          <a:p>
-            <a:pPr algn="l" indent="0" marL="0">
-              <a:lnSpc>
-                <a:spcPts val="1820"/>
-              </a:lnSpc>
-              <a:spcBef>
-                <a:spcPts val="300"/>
-              </a:spcBef>
-              <a:spcAft>
-                <a:spcPts val="300"/>
-              </a:spcAft>
-              <a:buNone/>
-            </a:pPr>
-            <a:r>
-              <a:rPr lang="en-US" sz="1300" dirty="0">
-                <a:solidFill>
-                  <a:srgbClr val="1C2833"/>
-                </a:solidFill>
-                <a:latin typeface="Georgia" pitchFamily="34" charset="0"/>
-                <a:ea typeface="Georgia" pitchFamily="34" charset="-122"/>
-                <a:cs typeface="Georgia" pitchFamily="34" charset="-120"/>
-              </a:rPr>
-              <a:t>The Sanskrit concept </a:t>
-            </a:r>
-            <a:pPr algn="l" indent="0" marL="0">
-              <a:lnSpc>
-                <a:spcPts val="1820"/>
-              </a:lnSpc>
-              <a:spcBef>
-                <a:spcPts val="300"/>
-              </a:spcBef>
-              <a:spcAft>
-                <a:spcPts val="300"/>
-              </a:spcAft>
-              <a:buNone/>
-            </a:pPr>
-            <a:r>
-              <a:rPr lang="en-US" sz="1300" i="1" dirty="0">
-                <a:solidFill>
-                  <a:srgbClr val="1C2833"/>
-                </a:solidFill>
-                <a:latin typeface="Georgia" pitchFamily="34" charset="0"/>
-                <a:ea typeface="Georgia" pitchFamily="34" charset="-122"/>
-                <a:cs typeface="Georgia" pitchFamily="34" charset="-120"/>
-              </a:rPr>
-              <a:t>Vasudhaiva Kuṭumbakam</a:t>
-            </a:r>
-            <a:pPr algn="l" indent="0" marL="0">
-              <a:lnSpc>
-                <a:spcPts val="1820"/>
-              </a:lnSpc>
-              <a:spcBef>
-                <a:spcPts val="300"/>
-              </a:spcBef>
-              <a:spcAft>
-                <a:spcPts val="300"/>
-              </a:spcAft>
-              <a:buNone/>
-            </a:pPr>
-            <a:r>
-              <a:rPr lang="en-US" sz="1300" dirty="0">
-                <a:solidFill>
-                  <a:srgbClr val="1C2833"/>
-                </a:solidFill>
-                <a:latin typeface="Georgia" pitchFamily="34" charset="0"/>
-                <a:ea typeface="Georgia" pitchFamily="34" charset="-122"/>
-                <a:cs typeface="Georgia" pitchFamily="34" charset="-120"/>
-              </a:rPr>
-              <a:t> — "the earth is one family" — is the ecological framing for this. We'll meet it again in Module 13.</a:t>
-            </a:r>
-            <a:endParaRPr lang="en-US" sz="1300" dirty="0"/>
-          </a:p>
-        </p:txBody>
-      </p:sp>
-      <p:sp>
-        <p:nvSpPr>
-          <p:cNvPr id="11" name="Text 9"/>
+            <a:pPr algn="l" marL="342900" indent="-342900">
+              <a:lnSpc>
+                <a:spcPts val="1620"/>
+              </a:lnSpc>
+              <a:spcAft>
+                <a:spcPts val="300"/>
+              </a:spcAft>
+              <a:buSzPct val="100000"/>
+              <a:buChar char="•"/>
+            </a:pPr>
+            <a:r>
+              <a:rPr lang="en-US" sz="1200" b="1" dirty="0">
+                <a:solidFill>
+                  <a:srgbClr val="1C2833"/>
+                </a:solidFill>
+                <a:latin typeface="Arial" pitchFamily="34" charset="0"/>
+                <a:ea typeface="Arial" pitchFamily="34" charset="-122"/>
+                <a:cs typeface="Arial" pitchFamily="34" charset="-120"/>
+              </a:rPr>
+              <a:t>What this element does for us</a:t>
+            </a:r>
+            <a:pPr algn="l" indent="0" marL="0">
+              <a:lnSpc>
+                <a:spcPts val="1620"/>
+              </a:lnSpc>
+              <a:spcAft>
+                <a:spcPts val="300"/>
+              </a:spcAft>
+              <a:buNone/>
+            </a:pPr>
+            <a:r>
+              <a:rPr lang="en-US" sz="1200" dirty="0">
+                <a:solidFill>
+                  <a:srgbClr val="1C2833"/>
+                </a:solidFill>
+                <a:latin typeface="Arial" pitchFamily="34" charset="0"/>
+                <a:ea typeface="Arial" pitchFamily="34" charset="-122"/>
+                <a:cs typeface="Arial" pitchFamily="34" charset="-120"/>
+              </a:rPr>
+              <a:t> (positive contributions)</a:t>
+            </a:r>
+            <a:endParaRPr lang="en-US" sz="1200" dirty="0"/>
+          </a:p>
+          <a:p>
+            <a:pPr algn="l" marL="342900" indent="-342900">
+              <a:lnSpc>
+                <a:spcPts val="1620"/>
+              </a:lnSpc>
+              <a:spcAft>
+                <a:spcPts val="300"/>
+              </a:spcAft>
+              <a:buSzPct val="100000"/>
+              <a:buChar char="•"/>
+            </a:pPr>
+            <a:r>
+              <a:rPr lang="en-US" sz="1200" b="1" dirty="0">
+                <a:solidFill>
+                  <a:srgbClr val="1C2833"/>
+                </a:solidFill>
+                <a:latin typeface="Arial" pitchFamily="34" charset="0"/>
+                <a:ea typeface="Arial" pitchFamily="34" charset="-122"/>
+                <a:cs typeface="Arial" pitchFamily="34" charset="-120"/>
+              </a:rPr>
+              <a:t>What an excess looks like in our area</a:t>
+            </a:r>
+            <a:pPr algn="l" indent="0" marL="0">
+              <a:lnSpc>
+                <a:spcPts val="1620"/>
+              </a:lnSpc>
+              <a:spcAft>
+                <a:spcPts val="300"/>
+              </a:spcAft>
+              <a:buNone/>
+            </a:pPr>
+            <a:r>
+              <a:rPr lang="en-US" sz="1200" dirty="0">
+                <a:solidFill>
+                  <a:srgbClr val="1C2833"/>
+                </a:solidFill>
+                <a:latin typeface="Arial" pitchFamily="34" charset="0"/>
+                <a:ea typeface="Arial" pitchFamily="34" charset="-122"/>
+                <a:cs typeface="Arial" pitchFamily="34" charset="-120"/>
+              </a:rPr>
+              <a:t> (one specific local example)</a:t>
+            </a:r>
+            <a:endParaRPr lang="en-US" sz="1200" dirty="0"/>
+          </a:p>
+          <a:p>
+            <a:pPr algn="l" marL="342900" indent="-342900">
+              <a:lnSpc>
+                <a:spcPts val="1620"/>
+              </a:lnSpc>
+              <a:spcAft>
+                <a:spcPts val="300"/>
+              </a:spcAft>
+              <a:buSzPct val="100000"/>
+              <a:buChar char="•"/>
+            </a:pPr>
+            <a:r>
+              <a:rPr lang="en-US" sz="1200" b="1" dirty="0">
+                <a:solidFill>
+                  <a:srgbClr val="1C2833"/>
+                </a:solidFill>
+                <a:latin typeface="Arial" pitchFamily="34" charset="0"/>
+                <a:ea typeface="Arial" pitchFamily="34" charset="-122"/>
+                <a:cs typeface="Arial" pitchFamily="34" charset="-120"/>
+              </a:rPr>
+              <a:t>What a depletion looks like in our area</a:t>
+            </a:r>
+            <a:pPr algn="l" indent="0" marL="0">
+              <a:lnSpc>
+                <a:spcPts val="1620"/>
+              </a:lnSpc>
+              <a:spcAft>
+                <a:spcPts val="300"/>
+              </a:spcAft>
+              <a:buNone/>
+            </a:pPr>
+            <a:r>
+              <a:rPr lang="en-US" sz="1200" dirty="0">
+                <a:solidFill>
+                  <a:srgbClr val="1C2833"/>
+                </a:solidFill>
+                <a:latin typeface="Arial" pitchFamily="34" charset="0"/>
+                <a:ea typeface="Arial" pitchFamily="34" charset="-122"/>
+                <a:cs typeface="Arial" pitchFamily="34" charset="-120"/>
+              </a:rPr>
+              <a:t> (one specific local example)</a:t>
+            </a:r>
+            <a:endParaRPr lang="en-US" sz="1200" dirty="0"/>
+          </a:p>
+          <a:p>
+            <a:pPr algn="l" marL="342900" indent="-342900">
+              <a:lnSpc>
+                <a:spcPts val="1620"/>
+              </a:lnSpc>
+              <a:spcAft>
+                <a:spcPts val="300"/>
+              </a:spcAft>
+              <a:buSzPct val="100000"/>
+              <a:buChar char="•"/>
+            </a:pPr>
+            <a:r>
+              <a:rPr lang="en-US" sz="1200" b="1" dirty="0">
+                <a:solidFill>
+                  <a:srgbClr val="1C2833"/>
+                </a:solidFill>
+                <a:latin typeface="Arial" pitchFamily="34" charset="0"/>
+                <a:ea typeface="Arial" pitchFamily="34" charset="-122"/>
+                <a:cs typeface="Arial" pitchFamily="34" charset="-120"/>
+              </a:rPr>
+              <a:t>One small thing students our age can actually do</a:t>
+            </a:r>
+            <a:pPr algn="l" indent="0" marL="0">
+              <a:lnSpc>
+                <a:spcPts val="1620"/>
+              </a:lnSpc>
+              <a:spcAft>
+                <a:spcPts val="300"/>
+              </a:spcAft>
+              <a:buNone/>
+            </a:pPr>
+            <a:r>
+              <a:rPr lang="en-US" sz="1200" dirty="0">
+                <a:solidFill>
+                  <a:srgbClr val="1C2833"/>
+                </a:solidFill>
+                <a:latin typeface="Arial" pitchFamily="34" charset="0"/>
+                <a:ea typeface="Arial" pitchFamily="34" charset="-122"/>
+                <a:cs typeface="Arial" pitchFamily="34" charset="-120"/>
+              </a:rPr>
+              <a:t> (concrete, doable this week)</a:t>
+            </a:r>
+            <a:endParaRPr lang="en-US" sz="1200" dirty="0"/>
+          </a:p>
+        </p:txBody>
+      </p:sp>
+      <p:sp>
+        <p:nvSpPr>
+          <p:cNvPr id="6" name="Text 4"/>
           <p:cNvSpPr/>
           <p:nvPr/>
         </p:nvSpPr>
